--- a/docs/pptx/Ch6_M3_Encapsulation_Information_Hiding.pptx
+++ b/docs/pptx/Ch6_M3_Encapsulation_Information_Hiding.pptx
@@ -11,9 +11,12 @@
     <p:sldId id="259" r:id="rId5"/>
     <p:sldId id="260" r:id="rId6"/>
     <p:sldId id="261" r:id="rId7"/>
+    <p:sldId id="262" r:id="rId8"/>
+    <p:sldId id="263" r:id="rId9"/>
+    <p:sldId id="264" r:id="rId10"/>
   </p:sldIdLst>
   <p:notesMasterIdLst>
-    <p:notesMasterId r:id="rId8"/>
+    <p:notesMasterId r:id="rId11"/>
   </p:notesMasterIdLst>
   <p:sldSz cx="9144000" cy="5143500"/>
   <p:notesSz cx="5143500" cy="9144000"/>
@@ -507,7 +510,11 @@
           <a:p>
             <a:r>
               <a:rPr lang="en-US" dirty="0"/>
-              <a:t/>
+              <a:t>TITRE: Encapsulation &amp;
+Information Hiding
+Critère: Critère M3 — Avantages de l'encapsulation dans un ADT
+Objectif de cette présentation : couvrir les concepts clés pour le critère Critère M3 — Avantages de l'encapsulation dans un ADT.
+Durée estimée : 1h30 à 2h avec exercices.</a:t>
             </a:r>
             <a:endParaRPr lang="en-US" dirty="0"/>
           </a:p>
@@ -595,7 +602,9 @@
           <a:p>
             <a:r>
               <a:rPr lang="en-US" dirty="0"/>
-              <a:t/>
+              <a:t>PROF: Commencer par l'analogie du coffre-fort : les données sont dedans (private), on y accède avec la clé (getters/setters).
+Question : 'Pourquoi ne pas mettre tous les attributs en public ?'
+Réponse attendue : pas de contrôle, pas de validation, pas de sécurité.</a:t>
             </a:r>
             <a:endParaRPr lang="en-US" dirty="0"/>
           </a:p>
@@ -683,7 +692,11 @@
           <a:p>
             <a:r>
               <a:rPr lang="en-US" dirty="0"/>
-              <a:t/>
+              <a:t>PROF: Faire coder en live :
+1. Classe CompteBancaire avec solde public → montrer le problème
+2. Refactorer avec private + getSolde() + deposer(montant) avec validation montant &gt; 0
+Demander : 'Que se passe-t-il si quelqu'un fait compte.solde = -1000 ?' (avec public)
+Vs 'Que se passe-t-il avec deposer(-1000) ?' (avec validation)</a:t>
             </a:r>
             <a:endParaRPr lang="en-US" dirty="0"/>
           </a:p>
@@ -771,7 +784,11 @@
           <a:p>
             <a:r>
               <a:rPr lang="en-US" dirty="0"/>
-              <a:t/>
+              <a:t>PROF: Différence subtile :
+- Encapsulation = REGROUPER données + méthodes
+- Information Hiding = CACHER l'implémentation
+Exemple : on peut encapsuler sans bien cacher (getters qui exposent tout).
+Exercice : donner une classe avec tous les getters et demander lesquels sont nécessaires et lesquels exposent trop.</a:t>
             </a:r>
             <a:endParaRPr lang="en-US" dirty="0"/>
           </a:p>
@@ -859,7 +876,9 @@
           <a:p>
             <a:r>
               <a:rPr lang="en-US" dirty="0"/>
-              <a:t/>
+              <a:t>PROF: Dessiner un diagramme au tableau avec 3 classes dans 2 packages.
+Montrer ce qui est accessible depuis chaque classe pour chaque niveau.
+Astuce mnémotechnique : 'Plus c'est sensible, plus c'est private'.</a:t>
             </a:r>
             <a:endParaRPr lang="en-US" dirty="0"/>
           </a:p>
@@ -947,7 +966,12 @@
           <a:p>
             <a:r>
               <a:rPr lang="en-US" dirty="0"/>
-              <a:t/>
+              <a:t>PROF: L'interface Java EST la traduction directe d'un ADT.
+Exemple live :
+interface Stockable { void ajouter(String item); }
+class Inventaire implements Stockable { ... }
+class Entrepot implements Stockable { ... }
+Montrer que le code client utilise Stockable sans connaître la classe concrète.</a:t>
             </a:r>
             <a:endParaRPr lang="en-US" dirty="0"/>
           </a:p>
@@ -971,6 +995,277 @@
             <a:fld id="{F7021451-1387-4CA6-816F-3879F97B5CBC}" type="slidenum">
               <a:rPr lang="en-US"/>
               <a:t>6</a:t>
+            </a:fld>
+            <a:endParaRPr lang="en-US"/>
+          </a:p>
+        </p:txBody>
+      </p:sp>
+    </p:spTree>
+    <p:extLst>
+      <p:ext uri="{BB962C8B-B14F-4D97-AF65-F5344CB8AC3E}">
+        <p14:creationId xmlns:p14="http://schemas.microsoft.com/office/powerpoint/2010/main" val="1024086991"/>
+      </p:ext>
+    </p:extLst>
+  </p:cSld>
+  <p:clrMapOvr>
+    <a:masterClrMapping/>
+  </p:clrMapOvr>
+</p:notes>
+</file>
+
+<file path=ppt/notesSlides/notesSlide7.xml><?xml version="1.0" encoding="utf-8"?>
+<p:notes xmlns:a="http://schemas.openxmlformats.org/drawingml/2006/main" xmlns:r="http://schemas.openxmlformats.org/officeDocument/2006/relationships" xmlns:p="http://schemas.openxmlformats.org/presentationml/2006/main">
+  <p:cSld>
+    <p:spTree>
+      <p:nvGrpSpPr>
+        <p:cNvPr id="1" name=""/>
+        <p:cNvGrpSpPr/>
+        <p:nvPr/>
+      </p:nvGrpSpPr>
+      <p:grpSpPr>
+        <a:xfrm>
+          <a:off x="0" y="0"/>
+          <a:ext cx="0" cy="0"/>
+          <a:chOff x="0" y="0"/>
+          <a:chExt cx="0" cy="0"/>
+        </a:xfrm>
+      </p:grpSpPr>
+      <p:sp>
+        <p:nvSpPr>
+          <p:cNvPr id="2" name="Slide Image Placeholder 1"/>
+          <p:cNvSpPr>
+            <a:spLocks noGrp="1" noRot="1" noChangeAspect="1"/>
+          </p:cNvSpPr>
+          <p:nvPr>
+            <p:ph type="sldImg"/>
+          </p:nvPr>
+        </p:nvSpPr>
+        <p:spPr/>
+      </p:sp>
+      <p:sp>
+        <p:nvSpPr>
+          <p:cNvPr id="3" name="Notes Placeholder 2"/>
+          <p:cNvSpPr>
+            <a:spLocks noGrp="1"/>
+          </p:cNvSpPr>
+          <p:nvPr>
+            <p:ph type="body" idx="1"/>
+          </p:nvPr>
+        </p:nvSpPr>
+        <p:spPr/>
+        <p:txBody>
+          <a:bodyPr/>
+          <a:lstStyle/>
+          <a:p>
+            <a:r>
+              <a:rPr lang="en-US" dirty="0"/>
+              <a:t>PROF: Montrer l'exemple Vehicule → Voiture.
+Piège classique : l'étudiant essaie d'accéder à un attribut private du parent directement.
+Solution : passer par les getters/setters du parent.
+Exercice : créer une hiérarchie Animal (private nom) → Chien (aboyer), en utilisant getNom() dans aboyer().</a:t>
+            </a:r>
+            <a:endParaRPr lang="en-US" dirty="0"/>
+          </a:p>
+        </p:txBody>
+      </p:sp>
+      <p:sp>
+        <p:nvSpPr>
+          <p:cNvPr id="4" name="Slide Number Placeholder 3"/>
+          <p:cNvSpPr>
+            <a:spLocks noGrp="1"/>
+          </p:cNvSpPr>
+          <p:nvPr>
+            <p:ph type="sldNum" sz="quarter" idx="10"/>
+          </p:nvPr>
+        </p:nvSpPr>
+        <p:spPr/>
+        <p:txBody>
+          <a:bodyPr/>
+          <a:lstStyle/>
+          <a:p>
+            <a:fld id="{F7021451-1387-4CA6-816F-3879F97B5CBC}" type="slidenum">
+              <a:rPr lang="en-US"/>
+              <a:t>7</a:t>
+            </a:fld>
+            <a:endParaRPr lang="en-US"/>
+          </a:p>
+        </p:txBody>
+      </p:sp>
+    </p:spTree>
+    <p:extLst>
+      <p:ext uri="{BB962C8B-B14F-4D97-AF65-F5344CB8AC3E}">
+        <p14:creationId xmlns:p14="http://schemas.microsoft.com/office/powerpoint/2010/main" val="1024086991"/>
+      </p:ext>
+    </p:extLst>
+  </p:cSld>
+  <p:clrMapOvr>
+    <a:masterClrMapping/>
+  </p:clrMapOvr>
+</p:notes>
+</file>
+
+<file path=ppt/notesSlides/notesSlide8.xml><?xml version="1.0" encoding="utf-8"?>
+<p:notes xmlns:a="http://schemas.openxmlformats.org/drawingml/2006/main" xmlns:r="http://schemas.openxmlformats.org/officeDocument/2006/relationships" xmlns:p="http://schemas.openxmlformats.org/presentationml/2006/main">
+  <p:cSld>
+    <p:spTree>
+      <p:nvGrpSpPr>
+        <p:cNvPr id="1" name=""/>
+        <p:cNvGrpSpPr/>
+        <p:nvPr/>
+      </p:nvGrpSpPr>
+      <p:grpSpPr>
+        <a:xfrm>
+          <a:off x="0" y="0"/>
+          <a:ext cx="0" cy="0"/>
+          <a:chOff x="0" y="0"/>
+          <a:chExt cx="0" cy="0"/>
+        </a:xfrm>
+      </p:grpSpPr>
+      <p:sp>
+        <p:nvSpPr>
+          <p:cNvPr id="2" name="Slide Image Placeholder 1"/>
+          <p:cNvSpPr>
+            <a:spLocks noGrp="1" noRot="1" noChangeAspect="1"/>
+          </p:cNvSpPr>
+          <p:nvPr>
+            <p:ph type="sldImg"/>
+          </p:nvPr>
+        </p:nvSpPr>
+        <p:spPr/>
+      </p:sp>
+      <p:sp>
+        <p:nvSpPr>
+          <p:cNvPr id="3" name="Notes Placeholder 2"/>
+          <p:cNvSpPr>
+            <a:spLocks noGrp="1"/>
+          </p:cNvSpPr>
+          <p:nvPr>
+            <p:ph type="body" idx="1"/>
+          </p:nvPr>
+        </p:nvSpPr>
+        <p:spPr/>
+        <p:txBody>
+          <a:bodyPr/>
+          <a:lstStyle/>
+          <a:p>
+            <a:r>
+              <a:rPr lang="en-US" dirty="0"/>
+              <a:t>PROF: C'est l'argument clé pour M3 : l'encapsulation PERMET de changer l'implémentation.
+Scénario concret : AuthService utilise HashMap pour les users → on passe à une base de données → OrderService ne change PAS car il utilise seulement login().
+Faire dessiner aux étudiants un diagramme de classes avec les dépendances.</a:t>
+            </a:r>
+            <a:endParaRPr lang="en-US" dirty="0"/>
+          </a:p>
+        </p:txBody>
+      </p:sp>
+      <p:sp>
+        <p:nvSpPr>
+          <p:cNvPr id="4" name="Slide Number Placeholder 3"/>
+          <p:cNvSpPr>
+            <a:spLocks noGrp="1"/>
+          </p:cNvSpPr>
+          <p:nvPr>
+            <p:ph type="sldNum" sz="quarter" idx="10"/>
+          </p:nvPr>
+        </p:nvSpPr>
+        <p:spPr/>
+        <p:txBody>
+          <a:bodyPr/>
+          <a:lstStyle/>
+          <a:p>
+            <a:fld id="{F7021451-1387-4CA6-816F-3879F97B5CBC}" type="slidenum">
+              <a:rPr lang="en-US"/>
+              <a:t>8</a:t>
+            </a:fld>
+            <a:endParaRPr lang="en-US"/>
+          </a:p>
+        </p:txBody>
+      </p:sp>
+    </p:spTree>
+    <p:extLst>
+      <p:ext uri="{BB962C8B-B14F-4D97-AF65-F5344CB8AC3E}">
+        <p14:creationId xmlns:p14="http://schemas.microsoft.com/office/powerpoint/2010/main" val="1024086991"/>
+      </p:ext>
+    </p:extLst>
+  </p:cSld>
+  <p:clrMapOvr>
+    <a:masterClrMapping/>
+  </p:clrMapOvr>
+</p:notes>
+</file>
+
+<file path=ppt/notesSlides/notesSlide9.xml><?xml version="1.0" encoding="utf-8"?>
+<p:notes xmlns:a="http://schemas.openxmlformats.org/drawingml/2006/main" xmlns:r="http://schemas.openxmlformats.org/officeDocument/2006/relationships" xmlns:p="http://schemas.openxmlformats.org/presentationml/2006/main">
+  <p:cSld>
+    <p:spTree>
+      <p:nvGrpSpPr>
+        <p:cNvPr id="1" name=""/>
+        <p:cNvGrpSpPr/>
+        <p:nvPr/>
+      </p:nvGrpSpPr>
+      <p:grpSpPr>
+        <a:xfrm>
+          <a:off x="0" y="0"/>
+          <a:ext cx="0" cy="0"/>
+          <a:chOff x="0" y="0"/>
+          <a:chExt cx="0" cy="0"/>
+        </a:xfrm>
+      </p:grpSpPr>
+      <p:sp>
+        <p:nvSpPr>
+          <p:cNvPr id="2" name="Slide Image Placeholder 1"/>
+          <p:cNvSpPr>
+            <a:spLocks noGrp="1" noRot="1" noChangeAspect="1"/>
+          </p:cNvSpPr>
+          <p:nvPr>
+            <p:ph type="sldImg"/>
+          </p:nvPr>
+        </p:nvSpPr>
+        <p:spPr/>
+      </p:sp>
+      <p:sp>
+        <p:nvSpPr>
+          <p:cNvPr id="3" name="Notes Placeholder 2"/>
+          <p:cNvSpPr>
+            <a:spLocks noGrp="1"/>
+          </p:cNvSpPr>
+          <p:nvPr>
+            <p:ph type="body" idx="1"/>
+          </p:nvPr>
+        </p:nvSpPr>
+        <p:spPr/>
+        <p:txBody>
+          <a:bodyPr/>
+          <a:lstStyle/>
+          <a:p>
+            <a:r>
+              <a:rPr lang="en-US" dirty="0"/>
+              <a:t>PROF: Évaluation rapide : poser 3 questions à main levée.
+Devoir M3 : écrire un paragraphe expliquant les avantages de l'encapsulation et de l'information hiding dans un ADT, avec un exemple concret.
+Rappeler le site : unite19-gamifie.vercel.app → Monde 2 → Ch6 (simulateur visuel).</a:t>
+            </a:r>
+            <a:endParaRPr lang="en-US" dirty="0"/>
+          </a:p>
+        </p:txBody>
+      </p:sp>
+      <p:sp>
+        <p:nvSpPr>
+          <p:cNvPr id="4" name="Slide Number Placeholder 3"/>
+          <p:cNvSpPr>
+            <a:spLocks noGrp="1"/>
+          </p:cNvSpPr>
+          <p:nvPr>
+            <p:ph type="sldNum" sz="quarter" idx="10"/>
+          </p:nvPr>
+        </p:nvSpPr>
+        <p:spPr/>
+        <p:txBody>
+          <a:bodyPr/>
+          <a:lstStyle/>
+          <a:p>
+            <a:fld id="{F7021451-1387-4CA6-816F-3879F97B5CBC}" type="slidenum">
+              <a:rPr lang="en-US"/>
+              <a:t>9</a:t>
             </a:fld>
             <a:endParaRPr lang="en-US"/>
           </a:p>
@@ -1302,7 +1597,7 @@
     <p:bg>
       <p:bgPr>
         <a:solidFill>
-          <a:srgbClr val="1B2A4A"/>
+          <a:srgbClr val="0B2027"/>
         </a:solidFill>
       </p:bgPr>
     </p:bg>
@@ -1329,13 +1624,13 @@
         <p:spPr>
           <a:xfrm>
             <a:off x="0" y="0"/>
-            <a:ext cx="9144000" cy="1097280"/>
+            <a:ext cx="9144000" cy="73152"/>
           </a:xfrm>
           <a:prstGeom prst="rect">
             <a:avLst/>
           </a:prstGeom>
           <a:solidFill>
-            <a:srgbClr val="065A82"/>
+            <a:srgbClr val="0891B2"/>
           </a:solidFill>
           <a:ln/>
         </p:spPr>
@@ -1348,7 +1643,7 @@
         </p:nvSpPr>
         <p:spPr>
           <a:xfrm>
-            <a:off x="731520" y="137160"/>
+            <a:off x="548640" y="365760"/>
             <a:ext cx="2743200" cy="365760"/>
           </a:xfrm>
           <a:prstGeom prst="rect">
@@ -1365,9 +1660,9 @@
               <a:buNone/>
             </a:pPr>
             <a:r>
-              <a:rPr lang="en-US" sz="1400" b="1" dirty="0">
-                <a:solidFill>
-                  <a:srgbClr val="00A896"/>
+              <a:rPr lang="en-US" sz="1200" b="1" spc="400" kern="0" dirty="0">
+                <a:solidFill>
+                  <a:srgbClr val="0891B2"/>
                 </a:solidFill>
                 <a:latin typeface="Calibri" pitchFamily="34" charset="0"/>
                 <a:ea typeface="Calibri" pitchFamily="34" charset="-122"/>
@@ -1375,7 +1670,7 @@
               </a:rPr>
               <a:t>MONDE 2</a:t>
             </a:r>
-            <a:endParaRPr lang="en-US" sz="1400" dirty="0"/>
+            <a:endParaRPr lang="en-US" sz="1200" dirty="0"/>
           </a:p>
         </p:txBody>
       </p:sp>
@@ -1387,8 +1682,8 @@
         </p:nvSpPr>
         <p:spPr>
           <a:xfrm>
-            <a:off x="731520" y="457200"/>
-            <a:ext cx="7315200" cy="457200"/>
+            <a:off x="548640" y="731520"/>
+            <a:ext cx="7315200" cy="365760"/>
           </a:xfrm>
           <a:prstGeom prst="rect">
             <a:avLst/>
@@ -1404,9 +1699,9 @@
               <a:buNone/>
             </a:pPr>
             <a:r>
-              <a:rPr lang="en-US" sz="1200" dirty="0">
-                <a:solidFill>
-                  <a:srgbClr val="E2E8F0"/>
+              <a:rPr lang="en-US" sz="1100" dirty="0">
+                <a:solidFill>
+                  <a:srgbClr val="94A3B8"/>
                 </a:solidFill>
                 <a:latin typeface="Calibri" pitchFamily="34" charset="0"/>
                 <a:ea typeface="Calibri" pitchFamily="34" charset="-122"/>
@@ -1414,7 +1709,7 @@
               </a:rPr>
               <a:t>UNIT 19 : Data Structures &amp; Algorithms</a:t>
             </a:r>
-            <a:endParaRPr lang="en-US" sz="1200" dirty="0"/>
+            <a:endParaRPr lang="en-US" sz="1100" dirty="0"/>
           </a:p>
         </p:txBody>
       </p:sp>
@@ -1426,8 +1721,8 @@
         </p:nvSpPr>
         <p:spPr>
           <a:xfrm>
-            <a:off x="731520" y="1645920"/>
-            <a:ext cx="7315200" cy="640080"/>
+            <a:off x="548640" y="1371600"/>
+            <a:ext cx="8229600" cy="457200"/>
           </a:xfrm>
           <a:prstGeom prst="rect">
             <a:avLst/>
@@ -1443,17 +1738,17 @@
               <a:buNone/>
             </a:pPr>
             <a:r>
-              <a:rPr lang="en-US" sz="4400" b="1" dirty="0">
-                <a:solidFill>
-                  <a:srgbClr val="FFFFFF"/>
-                </a:solidFill>
-                <a:latin typeface="Trebuchet MS" pitchFamily="34" charset="0"/>
-                <a:ea typeface="Trebuchet MS" pitchFamily="34" charset="-122"/>
-                <a:cs typeface="Trebuchet MS" pitchFamily="34" charset="-120"/>
+              <a:rPr lang="en-US" sz="1400" b="1" dirty="0">
+                <a:solidFill>
+                  <a:srgbClr val="0891B2"/>
+                </a:solidFill>
+                <a:latin typeface="Calibri" pitchFamily="34" charset="0"/>
+                <a:ea typeface="Calibri" pitchFamily="34" charset="-122"/>
+                <a:cs typeface="Calibri" pitchFamily="34" charset="-120"/>
               </a:rPr>
               <a:t>Chapitre 6</a:t>
             </a:r>
-            <a:endParaRPr lang="en-US" sz="4400" dirty="0"/>
+            <a:endParaRPr lang="en-US" sz="1400" dirty="0"/>
           </a:p>
         </p:txBody>
       </p:sp>
@@ -1465,8 +1760,8 @@
         </p:nvSpPr>
         <p:spPr>
           <a:xfrm>
-            <a:off x="731520" y="2286000"/>
-            <a:ext cx="7315200" cy="1097280"/>
+            <a:off x="548640" y="2011680"/>
+            <a:ext cx="8229600" cy="1371600"/>
           </a:xfrm>
           <a:prstGeom prst="rect">
             <a:avLst/>
@@ -1482,95 +1777,95 @@
               <a:buNone/>
             </a:pPr>
             <a:r>
-              <a:rPr lang="en-US" sz="3000" b="1" dirty="0">
-                <a:solidFill>
-                  <a:srgbClr val="00A896"/>
-                </a:solidFill>
-                <a:latin typeface="Trebuchet MS" pitchFamily="34" charset="0"/>
-                <a:ea typeface="Trebuchet MS" pitchFamily="34" charset="-122"/>
-                <a:cs typeface="Trebuchet MS" pitchFamily="34" charset="-120"/>
-              </a:rPr>
-              <a:t>Encapsulation et</a:t>
-            </a:r>
-            <a:endParaRPr lang="en-US" sz="3000" dirty="0"/>
+              <a:rPr lang="en-US" sz="3600" b="1" dirty="0">
+                <a:solidFill>
+                  <a:srgbClr val="FFFFFF"/>
+                </a:solidFill>
+                <a:latin typeface="Calibri" pitchFamily="34" charset="0"/>
+                <a:ea typeface="Calibri" pitchFamily="34" charset="-122"/>
+                <a:cs typeface="Calibri" pitchFamily="34" charset="-120"/>
+              </a:rPr>
+              <a:t>Encapsulation &amp;</a:t>
+            </a:r>
+            <a:endParaRPr lang="en-US" sz="3600" dirty="0"/>
           </a:p>
           <a:p>
             <a:pPr indent="0" marL="0">
               <a:buNone/>
             </a:pPr>
             <a:r>
-              <a:rPr lang="en-US" sz="3000" b="1" dirty="0">
-                <a:solidFill>
-                  <a:srgbClr val="00A896"/>
-                </a:solidFill>
-                <a:latin typeface="Trebuchet MS" pitchFamily="34" charset="0"/>
-                <a:ea typeface="Trebuchet MS" pitchFamily="34" charset="-122"/>
-                <a:cs typeface="Trebuchet MS" pitchFamily="34" charset="-120"/>
+              <a:rPr lang="en-US" sz="3600" b="1" dirty="0">
+                <a:solidFill>
+                  <a:srgbClr val="FFFFFF"/>
+                </a:solidFill>
+                <a:latin typeface="Calibri" pitchFamily="34" charset="0"/>
+                <a:ea typeface="Calibri" pitchFamily="34" charset="-122"/>
+                <a:cs typeface="Calibri" pitchFamily="34" charset="-120"/>
               </a:rPr>
               <a:t>Information Hiding</a:t>
             </a:r>
-            <a:endParaRPr lang="en-US" sz="3000" dirty="0"/>
-          </a:p>
-        </p:txBody>
-      </p:sp>
-      <p:sp>
-        <p:nvSpPr>
-          <p:cNvPr id="7" name="Shape 5"/>
-          <p:cNvSpPr/>
-          <p:nvPr/>
-        </p:nvSpPr>
-        <p:spPr>
-          <a:xfrm>
-            <a:off x="731520" y="3657600"/>
-            <a:ext cx="2286000" cy="54864"/>
+            <a:endParaRPr lang="en-US" sz="3600" dirty="0"/>
+          </a:p>
+        </p:txBody>
+      </p:sp>
+      <p:sp>
+        <p:nvSpPr>
+          <p:cNvPr id="7" name="Text 5"/>
+          <p:cNvSpPr/>
+          <p:nvPr/>
+        </p:nvSpPr>
+        <p:spPr>
+          <a:xfrm>
+            <a:off x="548640" y="3657600"/>
+            <a:ext cx="8229600" cy="365760"/>
           </a:xfrm>
           <a:prstGeom prst="rect">
             <a:avLst/>
           </a:prstGeom>
-          <a:solidFill>
-            <a:srgbClr val="F97316"/>
-          </a:solidFill>
-          <a:ln/>
-        </p:spPr>
-      </p:sp>
-      <p:sp>
-        <p:nvSpPr>
-          <p:cNvPr id="8" name="Text 6"/>
-          <p:cNvSpPr/>
-          <p:nvPr/>
-        </p:nvSpPr>
-        <p:spPr>
-          <a:xfrm>
-            <a:off x="731520" y="3840480"/>
-            <a:ext cx="7315200" cy="731520"/>
+          <a:noFill/>
+          <a:ln/>
+        </p:spPr>
+        <p:txBody>
+          <a:bodyPr wrap="square" rtlCol="0" anchor="ctr"/>
+          <a:lstStyle/>
+          <a:p>
+            <a:pPr indent="0" marL="0">
+              <a:buNone/>
+            </a:pPr>
+            <a:r>
+              <a:rPr lang="en-US" sz="1300" dirty="0">
+                <a:solidFill>
+                  <a:srgbClr val="94A3B8"/>
+                </a:solidFill>
+                <a:latin typeface="Calibri" pitchFamily="34" charset="0"/>
+                <a:ea typeface="Calibri" pitchFamily="34" charset="-122"/>
+                <a:cs typeface="Calibri" pitchFamily="34" charset="-120"/>
+              </a:rPr>
+              <a:t>Critère M3 — Avantages de l'encapsulation dans un ADT</a:t>
+            </a:r>
+            <a:endParaRPr lang="en-US" sz="1300" dirty="0"/>
+          </a:p>
+        </p:txBody>
+      </p:sp>
+      <p:sp>
+        <p:nvSpPr>
+          <p:cNvPr id="8" name="Shape 6"/>
+          <p:cNvSpPr/>
+          <p:nvPr/>
+        </p:nvSpPr>
+        <p:spPr>
+          <a:xfrm>
+            <a:off x="0" y="5074920"/>
+            <a:ext cx="9144000" cy="73152"/>
           </a:xfrm>
           <a:prstGeom prst="rect">
             <a:avLst/>
           </a:prstGeom>
-          <a:noFill/>
-          <a:ln/>
-        </p:spPr>
-        <p:txBody>
-          <a:bodyPr wrap="square" rtlCol="0" anchor="ctr"/>
-          <a:lstStyle/>
-          <a:p>
-            <a:pPr indent="0" marL="0">
-              <a:buNone/>
-            </a:pPr>
-            <a:r>
-              <a:rPr lang="en-US" sz="1300" i="1" dirty="0">
-                <a:solidFill>
-                  <a:srgbClr val="E2E8F0"/>
-                </a:solidFill>
-                <a:latin typeface="Calibri" pitchFamily="34" charset="0"/>
-                <a:ea typeface="Calibri" pitchFamily="34" charset="-122"/>
-                <a:cs typeface="Calibri" pitchFamily="34" charset="-120"/>
-              </a:rPr>
-              <a:t>M3</a:t>
-            </a:r>
-            <a:endParaRPr lang="en-US" sz="1300" dirty="0"/>
-          </a:p>
-        </p:txBody>
+          <a:solidFill>
+            <a:srgbClr val="0891B2"/>
+          </a:solidFill>
+          <a:ln/>
+        </p:spPr>
       </p:sp>
     </p:spTree>
   </p:cSld>
@@ -1586,7 +1881,7 @@
     <p:bg>
       <p:bgPr>
         <a:solidFill>
-          <a:srgbClr val="F8FAFC"/>
+          <a:srgbClr val="0B2027"/>
         </a:solidFill>
       </p:bgPr>
     </p:bg>
@@ -1613,13 +1908,13 @@
         <p:spPr>
           <a:xfrm>
             <a:off x="0" y="0"/>
-            <a:ext cx="109728" cy="5143500"/>
+            <a:ext cx="9144000" cy="54864"/>
           </a:xfrm>
           <a:prstGeom prst="rect">
             <a:avLst/>
           </a:prstGeom>
           <a:solidFill>
-            <a:srgbClr val="028090"/>
+            <a:srgbClr val="0891B2"/>
           </a:solidFill>
           <a:ln/>
         </p:spPr>
@@ -1632,7 +1927,7 @@
         </p:nvSpPr>
         <p:spPr>
           <a:xfrm>
-            <a:off x="457200" y="274320"/>
+            <a:off x="548640" y="274320"/>
             <a:ext cx="8229600" cy="548640"/>
           </a:xfrm>
           <a:prstGeom prst="rect">
@@ -1649,17 +1944,17 @@
               <a:buNone/>
             </a:pPr>
             <a:r>
-              <a:rPr lang="en-US" sz="2600" b="1" dirty="0">
-                <a:solidFill>
-                  <a:srgbClr val="1B2A4A"/>
-                </a:solidFill>
-                <a:latin typeface="Trebuchet MS" pitchFamily="34" charset="0"/>
-                <a:ea typeface="Trebuchet MS" pitchFamily="34" charset="-122"/>
-                <a:cs typeface="Trebuchet MS" pitchFamily="34" charset="-120"/>
-              </a:rPr>
-              <a:t>Encapsulation : regrouper données + opérations</a:t>
-            </a:r>
-            <a:endParaRPr lang="en-US" sz="2600" dirty="0"/>
+              <a:rPr lang="en-US" sz="2400" b="1" dirty="0">
+                <a:solidFill>
+                  <a:srgbClr val="FFFFFF"/>
+                </a:solidFill>
+                <a:latin typeface="Calibri" pitchFamily="34" charset="0"/>
+                <a:ea typeface="Calibri" pitchFamily="34" charset="-122"/>
+                <a:cs typeface="Calibri" pitchFamily="34" charset="-120"/>
+              </a:rPr>
+              <a:t>Définition de l'Encapsulation</a:t>
+            </a:r>
+            <a:endParaRPr lang="en-US" sz="2400" dirty="0"/>
           </a:p>
         </p:txBody>
       </p:sp>
@@ -1671,8 +1966,8 @@
         </p:nvSpPr>
         <p:spPr>
           <a:xfrm>
-            <a:off x="640080" y="1005840"/>
-            <a:ext cx="7772400" cy="457200"/>
+            <a:off x="548640" y="1005840"/>
+            <a:ext cx="8046720" cy="3657600"/>
           </a:xfrm>
           <a:prstGeom prst="rect">
             <a:avLst/>
@@ -1681,223 +1976,110 @@
           <a:ln/>
         </p:spPr>
         <p:txBody>
-          <a:bodyPr wrap="square" rtlCol="0" anchor="ctr"/>
+          <a:bodyPr wrap="square" rtlCol="0" anchor="t"/>
           <a:lstStyle/>
           <a:p>
             <a:pPr marL="342900" indent="-342900">
+              <a:lnSpc>
+                <a:spcPct val="130000"/>
+              </a:lnSpc>
               <a:buSzPct val="100000"/>
               <a:buChar char="•"/>
             </a:pPr>
             <a:r>
               <a:rPr lang="en-US" sz="1400" dirty="0">
                 <a:solidFill>
-                  <a:srgbClr val="334155"/>
-                </a:solidFill>
-                <a:latin typeface="Calibri" pitchFamily="34" charset="0"/>
-                <a:ea typeface="Calibri" pitchFamily="34" charset="-122"/>
-                <a:cs typeface="Calibri" pitchFamily="34" charset="-120"/>
-              </a:rPr>
-              <a:t>DÉFINITION : regrouper les attributs (données) et les méthodes (opérations) dans une seule unité</a:t>
+                  <a:srgbClr val="E2E8F0"/>
+                </a:solidFill>
+                <a:latin typeface="Calibri" pitchFamily="34" charset="0"/>
+                <a:ea typeface="Calibri" pitchFamily="34" charset="-122"/>
+                <a:cs typeface="Calibri" pitchFamily="34" charset="-120"/>
+              </a:rPr>
+              <a:t>Concept fondamental de la POO</a:t>
             </a:r>
             <a:endParaRPr lang="en-US" sz="1400" dirty="0"/>
           </a:p>
-        </p:txBody>
-      </p:sp>
-      <p:sp>
-        <p:nvSpPr>
-          <p:cNvPr id="5" name="Text 3"/>
-          <p:cNvSpPr/>
-          <p:nvPr/>
-        </p:nvSpPr>
-        <p:spPr>
-          <a:xfrm>
-            <a:off x="640080" y="1554480"/>
-            <a:ext cx="7772400" cy="457200"/>
-          </a:xfrm>
-          <a:prstGeom prst="rect">
-            <a:avLst/>
-          </a:prstGeom>
-          <a:noFill/>
-          <a:ln/>
-        </p:spPr>
-        <p:txBody>
-          <a:bodyPr wrap="square" rtlCol="0" anchor="ctr"/>
-          <a:lstStyle/>
           <a:p>
             <a:pPr marL="342900" indent="-342900">
+              <a:lnSpc>
+                <a:spcPct val="130000"/>
+              </a:lnSpc>
               <a:buSzPct val="100000"/>
               <a:buChar char="•"/>
             </a:pPr>
             <a:r>
               <a:rPr lang="en-US" sz="1400" dirty="0">
                 <a:solidFill>
-                  <a:srgbClr val="334155"/>
-                </a:solidFill>
-                <a:latin typeface="Calibri" pitchFamily="34" charset="0"/>
-                <a:ea typeface="Calibri" pitchFamily="34" charset="-122"/>
-                <a:cs typeface="Calibri" pitchFamily="34" charset="-120"/>
-              </a:rPr>
-              <a:t>En Java : une CLASSE regroupe private attributs + public méthodes</a:t>
+                  <a:srgbClr val="E2E8F0"/>
+                </a:solidFill>
+                <a:latin typeface="Calibri" pitchFamily="34" charset="0"/>
+                <a:ea typeface="Calibri" pitchFamily="34" charset="-122"/>
+                <a:cs typeface="Calibri" pitchFamily="34" charset="-120"/>
+              </a:rPr>
+              <a:t>Regrouper données + méthodes dans une seule unité (classe)</a:t>
             </a:r>
             <a:endParaRPr lang="en-US" sz="1400" dirty="0"/>
           </a:p>
-        </p:txBody>
-      </p:sp>
-      <p:sp>
-        <p:nvSpPr>
-          <p:cNvPr id="6" name="Text 4"/>
-          <p:cNvSpPr/>
-          <p:nvPr/>
-        </p:nvSpPr>
-        <p:spPr>
-          <a:xfrm>
-            <a:off x="640080" y="2103120"/>
-            <a:ext cx="7772400" cy="457200"/>
-          </a:xfrm>
-          <a:prstGeom prst="rect">
-            <a:avLst/>
-          </a:prstGeom>
-          <a:noFill/>
-          <a:ln/>
-        </p:spPr>
-        <p:txBody>
-          <a:bodyPr wrap="square" rtlCol="0" anchor="ctr"/>
-          <a:lstStyle/>
           <a:p>
             <a:pPr marL="342900" indent="-342900">
+              <a:lnSpc>
+                <a:spcPct val="130000"/>
+              </a:lnSpc>
               <a:buSzPct val="100000"/>
               <a:buChar char="•"/>
             </a:pPr>
             <a:r>
               <a:rPr lang="en-US" sz="1400" dirty="0">
                 <a:solidFill>
-                  <a:srgbClr val="334155"/>
-                </a:solidFill>
-                <a:latin typeface="Calibri" pitchFamily="34" charset="0"/>
-                <a:ea typeface="Calibri" pitchFamily="34" charset="-122"/>
-                <a:cs typeface="Calibri" pitchFamily="34" charset="-120"/>
-              </a:rPr>
-              <a:t>L'utilisateur n'accède aux données QUE via les méthodes publiques</a:t>
+                  <a:srgbClr val="E2E8F0"/>
+                </a:solidFill>
+                <a:latin typeface="Calibri" pitchFamily="34" charset="0"/>
+                <a:ea typeface="Calibri" pitchFamily="34" charset="-122"/>
+                <a:cs typeface="Calibri" pitchFamily="34" charset="-120"/>
+              </a:rPr>
+              <a:t>Contrôler l'accès avec des modificateurs (private, public)</a:t>
             </a:r>
             <a:endParaRPr lang="en-US" sz="1400" dirty="0"/>
           </a:p>
-        </p:txBody>
-      </p:sp>
-      <p:sp>
-        <p:nvSpPr>
-          <p:cNvPr id="7" name="Text 5"/>
-          <p:cNvSpPr/>
-          <p:nvPr/>
-        </p:nvSpPr>
-        <p:spPr>
-          <a:xfrm>
-            <a:off x="640080" y="2651760"/>
-            <a:ext cx="7772400" cy="457200"/>
-          </a:xfrm>
-          <a:prstGeom prst="rect">
-            <a:avLst/>
-          </a:prstGeom>
-          <a:noFill/>
-          <a:ln/>
-        </p:spPr>
-        <p:txBody>
-          <a:bodyPr wrap="square" rtlCol="0" anchor="ctr"/>
-          <a:lstStyle/>
           <a:p>
             <a:pPr marL="342900" indent="-342900">
+              <a:lnSpc>
+                <a:spcPct val="130000"/>
+              </a:lnSpc>
               <a:buSzPct val="100000"/>
               <a:buChar char="•"/>
             </a:pPr>
             <a:r>
               <a:rPr lang="en-US" sz="1400" dirty="0">
                 <a:solidFill>
-                  <a:srgbClr val="334155"/>
-                </a:solidFill>
-                <a:latin typeface="Calibri" pitchFamily="34" charset="0"/>
-                <a:ea typeface="Calibri" pitchFamily="34" charset="-122"/>
-                <a:cs typeface="Calibri" pitchFamily="34" charset="-120"/>
-              </a:rPr>
-              <a:t>Exemple : Stack → private int[] data + private int top → public push(), pop(), peek()</a:t>
+                  <a:srgbClr val="E2E8F0"/>
+                </a:solidFill>
+                <a:latin typeface="Calibri" pitchFamily="34" charset="0"/>
+                <a:ea typeface="Calibri" pitchFamily="34" charset="-122"/>
+                <a:cs typeface="Calibri" pitchFamily="34" charset="-120"/>
+              </a:rPr>
+              <a:t>Bouclier de protection : empêche l'accès direct aux données</a:t>
             </a:r>
             <a:endParaRPr lang="en-US" sz="1400" dirty="0"/>
           </a:p>
-        </p:txBody>
-      </p:sp>
-      <p:sp>
-        <p:nvSpPr>
-          <p:cNvPr id="8" name="Text 6"/>
-          <p:cNvSpPr/>
-          <p:nvPr/>
-        </p:nvSpPr>
-        <p:spPr>
-          <a:xfrm>
-            <a:off x="640080" y="3200400"/>
-            <a:ext cx="7772400" cy="457200"/>
-          </a:xfrm>
-          <a:prstGeom prst="rect">
-            <a:avLst/>
-          </a:prstGeom>
-          <a:noFill/>
-          <a:ln/>
-        </p:spPr>
-        <p:txBody>
-          <a:bodyPr wrap="square" rtlCol="0" anchor="ctr"/>
-          <a:lstStyle/>
           <a:p>
             <a:pPr marL="342900" indent="-342900">
+              <a:lnSpc>
+                <a:spcPct val="130000"/>
+              </a:lnSpc>
               <a:buSzPct val="100000"/>
               <a:buChar char="•"/>
             </a:pPr>
             <a:r>
               <a:rPr lang="en-US" sz="1400" dirty="0">
                 <a:solidFill>
-                  <a:srgbClr val="334155"/>
-                </a:solidFill>
-                <a:latin typeface="Calibri" pitchFamily="34" charset="0"/>
-                <a:ea typeface="Calibri" pitchFamily="34" charset="-122"/>
-                <a:cs typeface="Calibri" pitchFamily="34" charset="-120"/>
-              </a:rPr>
-              <a:t>Sans encapsulation : n'importe qui peut modifier data[] directement → DANGER</a:t>
-            </a:r>
-            <a:endParaRPr lang="en-US" sz="1400" dirty="0"/>
-          </a:p>
-        </p:txBody>
-      </p:sp>
-      <p:sp>
-        <p:nvSpPr>
-          <p:cNvPr id="9" name="Text 7"/>
-          <p:cNvSpPr/>
-          <p:nvPr/>
-        </p:nvSpPr>
-        <p:spPr>
-          <a:xfrm>
-            <a:off x="640080" y="3749040"/>
-            <a:ext cx="7772400" cy="457200"/>
-          </a:xfrm>
-          <a:prstGeom prst="rect">
-            <a:avLst/>
-          </a:prstGeom>
-          <a:noFill/>
-          <a:ln/>
-        </p:spPr>
-        <p:txBody>
-          <a:bodyPr wrap="square" rtlCol="0" anchor="ctr"/>
-          <a:lstStyle/>
-          <a:p>
-            <a:pPr marL="342900" indent="-342900">
-              <a:buSzPct val="100000"/>
-              <a:buChar char="•"/>
-            </a:pPr>
-            <a:r>
-              <a:rPr lang="en-US" sz="1400" dirty="0">
-                <a:solidFill>
-                  <a:srgbClr val="334155"/>
-                </a:solidFill>
-                <a:latin typeface="Calibri" pitchFamily="34" charset="0"/>
-                <a:ea typeface="Calibri" pitchFamily="34" charset="-122"/>
-                <a:cs typeface="Calibri" pitchFamily="34" charset="-120"/>
-              </a:rPr>
-              <a:t>Avec encapsulation : seules push/pop modifient les données → SÉCURITÉ</a:t>
+                  <a:srgbClr val="E2E8F0"/>
+                </a:solidFill>
+                <a:latin typeface="Calibri" pitchFamily="34" charset="0"/>
+                <a:ea typeface="Calibri" pitchFamily="34" charset="-122"/>
+                <a:cs typeface="Calibri" pitchFamily="34" charset="-120"/>
+              </a:rPr>
+              <a:t>L'utilisateur voit l'INTERFACE, pas l'IMPLÉMENTATION</a:t>
             </a:r>
             <a:endParaRPr lang="en-US" sz="1400" dirty="0"/>
           </a:p>
@@ -1917,7 +2099,7 @@
     <p:bg>
       <p:bgPr>
         <a:solidFill>
-          <a:srgbClr val="F8FAFC"/>
+          <a:srgbClr val="0B2027"/>
         </a:solidFill>
       </p:bgPr>
     </p:bg>
@@ -1944,13 +2126,13 @@
         <p:spPr>
           <a:xfrm>
             <a:off x="0" y="0"/>
-            <a:ext cx="109728" cy="5143500"/>
+            <a:ext cx="9144000" cy="54864"/>
           </a:xfrm>
           <a:prstGeom prst="rect">
             <a:avLst/>
           </a:prstGeom>
           <a:solidFill>
-            <a:srgbClr val="028090"/>
+            <a:srgbClr val="0891B2"/>
           </a:solidFill>
           <a:ln/>
         </p:spPr>
@@ -1963,7 +2145,7 @@
         </p:nvSpPr>
         <p:spPr>
           <a:xfrm>
-            <a:off x="457200" y="274320"/>
+            <a:off x="548640" y="274320"/>
             <a:ext cx="8229600" cy="548640"/>
           </a:xfrm>
           <a:prstGeom prst="rect">
@@ -1980,17 +2162,17 @@
               <a:buNone/>
             </a:pPr>
             <a:r>
-              <a:rPr lang="en-US" sz="2600" b="1" dirty="0">
-                <a:solidFill>
-                  <a:srgbClr val="1B2A4A"/>
-                </a:solidFill>
-                <a:latin typeface="Trebuchet MS" pitchFamily="34" charset="0"/>
-                <a:ea typeface="Trebuchet MS" pitchFamily="34" charset="-122"/>
-                <a:cs typeface="Trebuchet MS" pitchFamily="34" charset="-120"/>
-              </a:rPr>
-              <a:t>Information Hiding : cacher l'implémentation</a:t>
-            </a:r>
-            <a:endParaRPr lang="en-US" sz="2600" dirty="0"/>
+              <a:rPr lang="en-US" sz="2400" b="1" dirty="0">
+                <a:solidFill>
+                  <a:srgbClr val="FFFFFF"/>
+                </a:solidFill>
+                <a:latin typeface="Calibri" pitchFamily="34" charset="0"/>
+                <a:ea typeface="Calibri" pitchFamily="34" charset="-122"/>
+                <a:cs typeface="Calibri" pitchFamily="34" charset="-120"/>
+              </a:rPr>
+              <a:t>Comment concevoir une Encapsulation ?</a:t>
+            </a:r>
+            <a:endParaRPr lang="en-US" sz="2400" dirty="0"/>
           </a:p>
         </p:txBody>
       </p:sp>
@@ -2002,8 +2184,8 @@
         </p:nvSpPr>
         <p:spPr>
           <a:xfrm>
-            <a:off x="640080" y="1005840"/>
-            <a:ext cx="7772400" cy="457200"/>
+            <a:off x="548640" y="1005840"/>
+            <a:ext cx="3840480" cy="3200400"/>
           </a:xfrm>
           <a:prstGeom prst="rect">
             <a:avLst/>
@@ -2012,7 +2194,7 @@
           <a:ln/>
         </p:spPr>
         <p:txBody>
-          <a:bodyPr wrap="square" rtlCol="0" anchor="ctr"/>
+          <a:bodyPr wrap="square" rtlCol="0" anchor="t"/>
           <a:lstStyle/>
           <a:p>
             <a:pPr marL="342900" indent="-342900">
@@ -2020,190 +2202,124 @@
               <a:buChar char="•"/>
             </a:pPr>
             <a:r>
-              <a:rPr lang="en-US" sz="1400" dirty="0">
-                <a:solidFill>
-                  <a:srgbClr val="334155"/>
-                </a:solidFill>
-                <a:latin typeface="Calibri" pitchFamily="34" charset="0"/>
-                <a:ea typeface="Calibri" pitchFamily="34" charset="-122"/>
-                <a:cs typeface="Calibri" pitchFamily="34" charset="-120"/>
-              </a:rPr>
-              <a:t>DÉFINITION : exposer uniquement l'INTERFACE publique, cacher le COMMENT</a:t>
-            </a:r>
-            <a:endParaRPr lang="en-US" sz="1400" dirty="0"/>
-          </a:p>
-        </p:txBody>
-      </p:sp>
-      <p:sp>
-        <p:nvSpPr>
-          <p:cNvPr id="5" name="Text 3"/>
-          <p:cNvSpPr/>
-          <p:nvPr/>
-        </p:nvSpPr>
-        <p:spPr>
-          <a:xfrm>
-            <a:off x="640080" y="1554480"/>
-            <a:ext cx="7772400" cy="457200"/>
-          </a:xfrm>
-          <a:prstGeom prst="rect">
-            <a:avLst/>
-          </a:prstGeom>
-          <a:noFill/>
-          <a:ln/>
-        </p:spPr>
-        <p:txBody>
-          <a:bodyPr wrap="square" rtlCol="0" anchor="ctr"/>
-          <a:lstStyle/>
+              <a:rPr lang="en-US" sz="1300" dirty="0">
+                <a:solidFill>
+                  <a:srgbClr val="E2E8F0"/>
+                </a:solidFill>
+                <a:latin typeface="Calibri" pitchFamily="34" charset="0"/>
+                <a:ea typeface="Calibri" pitchFamily="34" charset="-122"/>
+                <a:cs typeface="Calibri" pitchFamily="34" charset="-120"/>
+              </a:rPr>
+              <a:t>1. Définir les attributs PRIVATE</a:t>
+            </a:r>
+            <a:endParaRPr lang="en-US" sz="1300" dirty="0"/>
+          </a:p>
           <a:p>
             <a:pPr marL="342900" indent="-342900">
               <a:buSzPct val="100000"/>
               <a:buChar char="•"/>
             </a:pPr>
             <a:r>
-              <a:rPr lang="en-US" sz="1400" dirty="0">
-                <a:solidFill>
-                  <a:srgbClr val="334155"/>
-                </a:solidFill>
-                <a:latin typeface="Calibri" pitchFamily="34" charset="0"/>
-                <a:ea typeface="Calibri" pitchFamily="34" charset="-122"/>
-                <a:cs typeface="Calibri" pitchFamily="34" charset="-120"/>
-              </a:rPr>
-              <a:t>L'utilisateur sait QUOI faire (push, pop) mais pas COMMENT c'est fait (tableau ? liste chaînée ?)</a:t>
-            </a:r>
-            <a:endParaRPr lang="en-US" sz="1400" dirty="0"/>
-          </a:p>
-        </p:txBody>
-      </p:sp>
-      <p:sp>
-        <p:nvSpPr>
-          <p:cNvPr id="6" name="Text 4"/>
-          <p:cNvSpPr/>
-          <p:nvPr/>
-        </p:nvSpPr>
-        <p:spPr>
-          <a:xfrm>
-            <a:off x="640080" y="2103120"/>
-            <a:ext cx="7772400" cy="457200"/>
-          </a:xfrm>
-          <a:prstGeom prst="rect">
-            <a:avLst/>
-          </a:prstGeom>
-          <a:noFill/>
-          <a:ln/>
-        </p:spPr>
-        <p:txBody>
-          <a:bodyPr wrap="square" rtlCol="0" anchor="ctr"/>
-          <a:lstStyle/>
+              <a:rPr lang="en-US" sz="1300" dirty="0">
+                <a:solidFill>
+                  <a:srgbClr val="E2E8F0"/>
+                </a:solidFill>
+                <a:latin typeface="Calibri" pitchFamily="34" charset="0"/>
+                <a:ea typeface="Calibri" pitchFamily="34" charset="-122"/>
+                <a:cs typeface="Calibri" pitchFamily="34" charset="-120"/>
+              </a:rPr>
+              <a:t>2. Fournir des GETTERS (méthodes d'accès publiques)</a:t>
+            </a:r>
+            <a:endParaRPr lang="en-US" sz="1300" dirty="0"/>
+          </a:p>
           <a:p>
             <a:pPr marL="342900" indent="-342900">
               <a:buSzPct val="100000"/>
               <a:buChar char="•"/>
             </a:pPr>
             <a:r>
-              <a:rPr lang="en-US" sz="1400" dirty="0">
-                <a:solidFill>
-                  <a:srgbClr val="334155"/>
-                </a:solidFill>
-                <a:latin typeface="Calibri" pitchFamily="34" charset="0"/>
-                <a:ea typeface="Calibri" pitchFamily="34" charset="-122"/>
-                <a:cs typeface="Calibri" pitchFamily="34" charset="-120"/>
-              </a:rPr>
-              <a:t>Avantage 1 : on peut CHANGER l'implémentation sans affecter le code client</a:t>
-            </a:r>
-            <a:endParaRPr lang="en-US" sz="1400" dirty="0"/>
-          </a:p>
-        </p:txBody>
-      </p:sp>
-      <p:sp>
-        <p:nvSpPr>
-          <p:cNvPr id="7" name="Text 5"/>
-          <p:cNvSpPr/>
-          <p:nvPr/>
-        </p:nvSpPr>
-        <p:spPr>
-          <a:xfrm>
-            <a:off x="640080" y="2651760"/>
-            <a:ext cx="7772400" cy="457200"/>
-          </a:xfrm>
-          <a:prstGeom prst="rect">
-            <a:avLst/>
-          </a:prstGeom>
-          <a:noFill/>
-          <a:ln/>
-        </p:spPr>
-        <p:txBody>
-          <a:bodyPr wrap="square" rtlCol="0" anchor="ctr"/>
-          <a:lstStyle/>
+              <a:rPr lang="en-US" sz="1300" dirty="0">
+                <a:solidFill>
+                  <a:srgbClr val="E2E8F0"/>
+                </a:solidFill>
+                <a:latin typeface="Calibri" pitchFamily="34" charset="0"/>
+                <a:ea typeface="Calibri" pitchFamily="34" charset="-122"/>
+                <a:cs typeface="Calibri" pitchFamily="34" charset="-120"/>
+              </a:rPr>
+              <a:t>3. Fournir des SETTERS avec VALIDATION</a:t>
+            </a:r>
+            <a:endParaRPr lang="en-US" sz="1300" dirty="0"/>
+          </a:p>
           <a:p>
             <a:pPr marL="342900" indent="-342900">
               <a:buSzPct val="100000"/>
               <a:buChar char="•"/>
             </a:pPr>
             <a:r>
-              <a:rPr lang="en-US" sz="1400" dirty="0">
-                <a:solidFill>
-                  <a:srgbClr val="334155"/>
-                </a:solidFill>
-                <a:latin typeface="Calibri" pitchFamily="34" charset="0"/>
-                <a:ea typeface="Calibri" pitchFamily="34" charset="-122"/>
-                <a:cs typeface="Calibri" pitchFamily="34" charset="-120"/>
-              </a:rPr>
-              <a:t>Avantage 2 : le code est plus SÛRE — impossible de corrompre l'état interne</a:t>
-            </a:r>
-            <a:endParaRPr lang="en-US" sz="1400" dirty="0"/>
-          </a:p>
-        </p:txBody>
-      </p:sp>
-      <p:sp>
-        <p:nvSpPr>
-          <p:cNvPr id="8" name="Text 6"/>
-          <p:cNvSpPr/>
-          <p:nvPr/>
-        </p:nvSpPr>
-        <p:spPr>
-          <a:xfrm>
-            <a:off x="640080" y="3200400"/>
-            <a:ext cx="7772400" cy="457200"/>
-          </a:xfrm>
-          <a:prstGeom prst="rect">
-            <a:avLst/>
-          </a:prstGeom>
-          <a:noFill/>
-          <a:ln/>
-        </p:spPr>
-        <p:txBody>
-          <a:bodyPr wrap="square" rtlCol="0" anchor="ctr"/>
-          <a:lstStyle/>
+              <a:rPr lang="en-US" sz="1300" dirty="0">
+                <a:solidFill>
+                  <a:srgbClr val="E2E8F0"/>
+                </a:solidFill>
+                <a:latin typeface="Calibri" pitchFamily="34" charset="0"/>
+                <a:ea typeface="Calibri" pitchFamily="34" charset="-122"/>
+                <a:cs typeface="Calibri" pitchFamily="34" charset="-120"/>
+              </a:rPr>
+              <a:t>4. Utiliser les classes encapsulées via l'interface publique</a:t>
+            </a:r>
+            <a:endParaRPr lang="en-US" sz="1300" dirty="0"/>
+          </a:p>
           <a:p>
             <a:pPr marL="342900" indent="-342900">
               <a:buSzPct val="100000"/>
               <a:buChar char="•"/>
             </a:pPr>
             <a:r>
-              <a:rPr lang="en-US" sz="1400" dirty="0">
-                <a:solidFill>
-                  <a:srgbClr val="334155"/>
-                </a:solidFill>
-                <a:latin typeface="Calibri" pitchFamily="34" charset="0"/>
-                <a:ea typeface="Calibri" pitchFamily="34" charset="-122"/>
-                <a:cs typeface="Calibri" pitchFamily="34" charset="-120"/>
-              </a:rPr>
-              <a:t>Avantage 3 : SIMPLICITÉ — l'utilisateur n'a pas besoin de comprendre les détails</a:t>
-            </a:r>
-            <a:endParaRPr lang="en-US" sz="1400" dirty="0"/>
-          </a:p>
-        </p:txBody>
-      </p:sp>
-      <p:sp>
-        <p:nvSpPr>
-          <p:cNvPr id="9" name="Text 7"/>
-          <p:cNvSpPr/>
-          <p:nvPr/>
-        </p:nvSpPr>
-        <p:spPr>
-          <a:xfrm>
-            <a:off x="640080" y="3749040"/>
-            <a:ext cx="7772400" cy="457200"/>
+              <a:rPr lang="en-US" sz="1300" dirty="0">
+                <a:solidFill>
+                  <a:srgbClr val="E2E8F0"/>
+                </a:solidFill>
+                <a:latin typeface="Calibri" pitchFamily="34" charset="0"/>
+                <a:ea typeface="Calibri" pitchFamily="34" charset="-122"/>
+                <a:cs typeface="Calibri" pitchFamily="34" charset="-120"/>
+              </a:rPr>
+              <a:t>5. Maintenir la cohérence : modifier l'interne sans affecter le client</a:t>
+            </a:r>
+            <a:endParaRPr lang="en-US" sz="1300" dirty="0"/>
+          </a:p>
+        </p:txBody>
+      </p:sp>
+      <p:sp>
+        <p:nvSpPr>
+          <p:cNvPr id="5" name="Shape 3"/>
+          <p:cNvSpPr/>
+          <p:nvPr/>
+        </p:nvSpPr>
+        <p:spPr>
+          <a:xfrm>
+            <a:off x="4754880" y="1005840"/>
+            <a:ext cx="4023360" cy="3200400"/>
+          </a:xfrm>
+          <a:prstGeom prst="roundRect">
+            <a:avLst>
+              <a:gd name="adj" fmla="val 2857"/>
+            </a:avLst>
+          </a:prstGeom>
+          <a:solidFill>
+            <a:srgbClr val="0D1117"/>
+          </a:solidFill>
+          <a:ln/>
+        </p:spPr>
+      </p:sp>
+      <p:sp>
+        <p:nvSpPr>
+          <p:cNvPr id="6" name="Text 4"/>
+          <p:cNvSpPr/>
+          <p:nvPr/>
+        </p:nvSpPr>
+        <p:spPr>
+          <a:xfrm>
+            <a:off x="4937760" y="1143000"/>
+            <a:ext cx="3657600" cy="2926080"/>
           </a:xfrm>
           <a:prstGeom prst="rect">
             <a:avLst/>
@@ -2212,25 +2328,217 @@
           <a:ln/>
         </p:spPr>
         <p:txBody>
-          <a:bodyPr wrap="square" rtlCol="0" anchor="ctr"/>
-          <a:lstStyle/>
-          <a:p>
-            <a:pPr marL="342900" indent="-342900">
-              <a:buSzPct val="100000"/>
-              <a:buChar char="•"/>
-            </a:pPr>
-            <a:r>
-              <a:rPr lang="en-US" sz="1400" dirty="0">
-                <a:solidFill>
-                  <a:srgbClr val="334155"/>
-                </a:solidFill>
-                <a:latin typeface="Calibri" pitchFamily="34" charset="0"/>
-                <a:ea typeface="Calibri" pitchFamily="34" charset="-122"/>
-                <a:cs typeface="Calibri" pitchFamily="34" charset="-120"/>
-              </a:rPr>
-              <a:t>En Java : private pour les attributs, public pour l'interface → c'est de l'information hiding !</a:t>
-            </a:r>
-            <a:endParaRPr lang="en-US" sz="1400" dirty="0"/>
+          <a:bodyPr wrap="square" rtlCol="0" anchor="t"/>
+          <a:lstStyle/>
+          <a:p>
+            <a:pPr indent="0" marL="0">
+              <a:buNone/>
+            </a:pPr>
+            <a:r>
+              <a:rPr lang="en-US" sz="1000" dirty="0">
+                <a:solidFill>
+                  <a:srgbClr val="A5F3FC"/>
+                </a:solidFill>
+                <a:latin typeface="Consolas" pitchFamily="34" charset="0"/>
+                <a:ea typeface="Consolas" pitchFamily="34" charset="-122"/>
+                <a:cs typeface="Consolas" pitchFamily="34" charset="-120"/>
+              </a:rPr>
+              <a:t>// AVANT (mauvais)</a:t>
+            </a:r>
+            <a:endParaRPr lang="en-US" sz="1000" dirty="0"/>
+          </a:p>
+          <a:p>
+            <a:pPr indent="0" marL="0">
+              <a:buNone/>
+            </a:pPr>
+            <a:r>
+              <a:rPr lang="en-US" sz="1000" dirty="0">
+                <a:solidFill>
+                  <a:srgbClr val="A5F3FC"/>
+                </a:solidFill>
+                <a:latin typeface="Consolas" pitchFamily="34" charset="0"/>
+                <a:ea typeface="Consolas" pitchFamily="34" charset="-122"/>
+                <a:cs typeface="Consolas" pitchFamily="34" charset="-120"/>
+              </a:rPr>
+              <a:t>public class Compte {</a:t>
+            </a:r>
+            <a:endParaRPr lang="en-US" sz="1000" dirty="0"/>
+          </a:p>
+          <a:p>
+            <a:pPr indent="0" marL="0">
+              <a:buNone/>
+            </a:pPr>
+            <a:r>
+              <a:rPr lang="en-US" sz="1000" dirty="0">
+                <a:solidFill>
+                  <a:srgbClr val="A5F3FC"/>
+                </a:solidFill>
+                <a:latin typeface="Consolas" pitchFamily="34" charset="0"/>
+                <a:ea typeface="Consolas" pitchFamily="34" charset="-122"/>
+                <a:cs typeface="Consolas" pitchFamily="34" charset="-120"/>
+              </a:rPr>
+              <a:t>    public double solde; // DANGER!</a:t>
+            </a:r>
+            <a:endParaRPr lang="en-US" sz="1000" dirty="0"/>
+          </a:p>
+          <a:p>
+            <a:pPr indent="0" marL="0">
+              <a:buNone/>
+            </a:pPr>
+            <a:r>
+              <a:rPr lang="en-US" sz="1000" dirty="0">
+                <a:solidFill>
+                  <a:srgbClr val="A5F3FC"/>
+                </a:solidFill>
+                <a:latin typeface="Consolas" pitchFamily="34" charset="0"/>
+                <a:ea typeface="Consolas" pitchFamily="34" charset="-122"/>
+                <a:cs typeface="Consolas" pitchFamily="34" charset="-120"/>
+              </a:rPr>
+              <a:t>}</a:t>
+            </a:r>
+            <a:endParaRPr lang="en-US" sz="1000" dirty="0"/>
+          </a:p>
+          <a:p>
+            <a:pPr indent="0" marL="0">
+              <a:buNone/>
+            </a:pPr>
+            <a:endParaRPr lang="en-US" sz="1000" dirty="0"/>
+          </a:p>
+          <a:p>
+            <a:pPr indent="0" marL="0">
+              <a:buNone/>
+            </a:pPr>
+            <a:r>
+              <a:rPr lang="en-US" sz="1000" dirty="0">
+                <a:solidFill>
+                  <a:srgbClr val="A5F3FC"/>
+                </a:solidFill>
+                <a:latin typeface="Consolas" pitchFamily="34" charset="0"/>
+                <a:ea typeface="Consolas" pitchFamily="34" charset="-122"/>
+                <a:cs typeface="Consolas" pitchFamily="34" charset="-120"/>
+              </a:rPr>
+              <a:t>// APRÈS (encapsulé)</a:t>
+            </a:r>
+            <a:endParaRPr lang="en-US" sz="1000" dirty="0"/>
+          </a:p>
+          <a:p>
+            <a:pPr indent="0" marL="0">
+              <a:buNone/>
+            </a:pPr>
+            <a:r>
+              <a:rPr lang="en-US" sz="1000" dirty="0">
+                <a:solidFill>
+                  <a:srgbClr val="A5F3FC"/>
+                </a:solidFill>
+                <a:latin typeface="Consolas" pitchFamily="34" charset="0"/>
+                <a:ea typeface="Consolas" pitchFamily="34" charset="-122"/>
+                <a:cs typeface="Consolas" pitchFamily="34" charset="-120"/>
+              </a:rPr>
+              <a:t>public class Compte {</a:t>
+            </a:r>
+            <a:endParaRPr lang="en-US" sz="1000" dirty="0"/>
+          </a:p>
+          <a:p>
+            <a:pPr indent="0" marL="0">
+              <a:buNone/>
+            </a:pPr>
+            <a:r>
+              <a:rPr lang="en-US" sz="1000" dirty="0">
+                <a:solidFill>
+                  <a:srgbClr val="A5F3FC"/>
+                </a:solidFill>
+                <a:latin typeface="Consolas" pitchFamily="34" charset="0"/>
+                <a:ea typeface="Consolas" pitchFamily="34" charset="-122"/>
+                <a:cs typeface="Consolas" pitchFamily="34" charset="-120"/>
+              </a:rPr>
+              <a:t>    private double solde;</a:t>
+            </a:r>
+            <a:endParaRPr lang="en-US" sz="1000" dirty="0"/>
+          </a:p>
+          <a:p>
+            <a:pPr indent="0" marL="0">
+              <a:buNone/>
+            </a:pPr>
+            <a:r>
+              <a:rPr lang="en-US" sz="1000" dirty="0">
+                <a:solidFill>
+                  <a:srgbClr val="A5F3FC"/>
+                </a:solidFill>
+                <a:latin typeface="Consolas" pitchFamily="34" charset="0"/>
+                <a:ea typeface="Consolas" pitchFamily="34" charset="-122"/>
+                <a:cs typeface="Consolas" pitchFamily="34" charset="-120"/>
+              </a:rPr>
+              <a:t>    </a:t>
+            </a:r>
+            <a:endParaRPr lang="en-US" sz="1000" dirty="0"/>
+          </a:p>
+          <a:p>
+            <a:pPr indent="0" marL="0">
+              <a:buNone/>
+            </a:pPr>
+            <a:r>
+              <a:rPr lang="en-US" sz="1000" dirty="0">
+                <a:solidFill>
+                  <a:srgbClr val="A5F3FC"/>
+                </a:solidFill>
+                <a:latin typeface="Consolas" pitchFamily="34" charset="0"/>
+                <a:ea typeface="Consolas" pitchFamily="34" charset="-122"/>
+                <a:cs typeface="Consolas" pitchFamily="34" charset="-120"/>
+              </a:rPr>
+              <a:t>    public void deposer(double m) {</a:t>
+            </a:r>
+            <a:endParaRPr lang="en-US" sz="1000" dirty="0"/>
+          </a:p>
+          <a:p>
+            <a:pPr indent="0" marL="0">
+              <a:buNone/>
+            </a:pPr>
+            <a:r>
+              <a:rPr lang="en-US" sz="1000" dirty="0">
+                <a:solidFill>
+                  <a:srgbClr val="A5F3FC"/>
+                </a:solidFill>
+                <a:latin typeface="Consolas" pitchFamily="34" charset="0"/>
+                <a:ea typeface="Consolas" pitchFamily="34" charset="-122"/>
+                <a:cs typeface="Consolas" pitchFamily="34" charset="-120"/>
+              </a:rPr>
+              <a:t>        if (m &gt; 0) solde += m;</a:t>
+            </a:r>
+            <a:endParaRPr lang="en-US" sz="1000" dirty="0"/>
+          </a:p>
+          <a:p>
+            <a:pPr indent="0" marL="0">
+              <a:buNone/>
+            </a:pPr>
+            <a:r>
+              <a:rPr lang="en-US" sz="1000" dirty="0">
+                <a:solidFill>
+                  <a:srgbClr val="A5F3FC"/>
+                </a:solidFill>
+                <a:latin typeface="Consolas" pitchFamily="34" charset="0"/>
+                <a:ea typeface="Consolas" pitchFamily="34" charset="-122"/>
+                <a:cs typeface="Consolas" pitchFamily="34" charset="-120"/>
+              </a:rPr>
+              <a:t>    }</a:t>
+            </a:r>
+            <a:endParaRPr lang="en-US" sz="1000" dirty="0"/>
+          </a:p>
+          <a:p>
+            <a:pPr indent="0" marL="0">
+              <a:buNone/>
+            </a:pPr>
+            <a:r>
+              <a:rPr lang="en-US" sz="1000" dirty="0">
+                <a:solidFill>
+                  <a:srgbClr val="A5F3FC"/>
+                </a:solidFill>
+                <a:latin typeface="Consolas" pitchFamily="34" charset="0"/>
+                <a:ea typeface="Consolas" pitchFamily="34" charset="-122"/>
+                <a:cs typeface="Consolas" pitchFamily="34" charset="-120"/>
+              </a:rPr>
+              <a:t>}</a:t>
+            </a:r>
+            <a:endParaRPr lang="en-US" sz="1000" dirty="0"/>
           </a:p>
         </p:txBody>
       </p:sp>
@@ -2248,7 +2556,7 @@
     <p:bg>
       <p:bgPr>
         <a:solidFill>
-          <a:srgbClr val="F8FAFC"/>
+          <a:srgbClr val="0B2027"/>
         </a:solidFill>
       </p:bgPr>
     </p:bg>
@@ -2275,13 +2583,13 @@
         <p:spPr>
           <a:xfrm>
             <a:off x="0" y="0"/>
-            <a:ext cx="109728" cy="5143500"/>
+            <a:ext cx="9144000" cy="54864"/>
           </a:xfrm>
           <a:prstGeom prst="rect">
             <a:avLst/>
           </a:prstGeom>
           <a:solidFill>
-            <a:srgbClr val="028090"/>
+            <a:srgbClr val="0891B2"/>
           </a:solidFill>
           <a:ln/>
         </p:spPr>
@@ -2294,8 +2602,8 @@
         </p:nvSpPr>
         <p:spPr>
           <a:xfrm>
-            <a:off x="457200" y="274320"/>
-            <a:ext cx="8229600" cy="457200"/>
+            <a:off x="548640" y="274320"/>
+            <a:ext cx="8229600" cy="548640"/>
           </a:xfrm>
           <a:prstGeom prst="rect">
             <a:avLst/>
@@ -2311,490 +2619,144 @@
               <a:buNone/>
             </a:pPr>
             <a:r>
-              <a:rPr lang="en-US" sz="2600" b="1" dirty="0">
-                <a:solidFill>
-                  <a:srgbClr val="1B2A4A"/>
-                </a:solidFill>
-                <a:latin typeface="Trebuchet MS" pitchFamily="34" charset="0"/>
-                <a:ea typeface="Trebuchet MS" pitchFamily="34" charset="-122"/>
-                <a:cs typeface="Trebuchet MS" pitchFamily="34" charset="-120"/>
-              </a:rPr>
-              <a:t>Exemple : changer l'implémentation</a:t>
-            </a:r>
-            <a:endParaRPr lang="en-US" sz="2600" dirty="0"/>
-          </a:p>
-        </p:txBody>
-      </p:sp>
-      <p:sp>
-        <p:nvSpPr>
-          <p:cNvPr id="4" name="Shape 2"/>
-          <p:cNvSpPr/>
-          <p:nvPr/>
-        </p:nvSpPr>
-        <p:spPr>
-          <a:xfrm>
-            <a:off x="457200" y="822960"/>
-            <a:ext cx="8229600" cy="3840480"/>
+              <a:rPr lang="en-US" sz="2400" b="1" dirty="0">
+                <a:solidFill>
+                  <a:srgbClr val="FFFFFF"/>
+                </a:solidFill>
+                <a:latin typeface="Calibri" pitchFamily="34" charset="0"/>
+                <a:ea typeface="Calibri" pitchFamily="34" charset="-122"/>
+                <a:cs typeface="Calibri" pitchFamily="34" charset="-120"/>
+              </a:rPr>
+              <a:t>Information Hiding</a:t>
+            </a:r>
+            <a:endParaRPr lang="en-US" sz="2400" dirty="0"/>
+          </a:p>
+        </p:txBody>
+      </p:sp>
+      <p:sp>
+        <p:nvSpPr>
+          <p:cNvPr id="4" name="Text 2"/>
+          <p:cNvSpPr/>
+          <p:nvPr/>
+        </p:nvSpPr>
+        <p:spPr>
+          <a:xfrm>
+            <a:off x="548640" y="1005840"/>
+            <a:ext cx="8046720" cy="3657600"/>
           </a:xfrm>
           <a:prstGeom prst="rect">
             <a:avLst/>
           </a:prstGeom>
-          <a:solidFill>
-            <a:srgbClr val="1E293B"/>
-          </a:solidFill>
-          <a:ln/>
-        </p:spPr>
-      </p:sp>
-      <p:sp>
-        <p:nvSpPr>
-          <p:cNvPr id="5" name="Text 3"/>
-          <p:cNvSpPr/>
-          <p:nvPr/>
-        </p:nvSpPr>
-        <p:spPr>
-          <a:xfrm>
-            <a:off x="640080" y="914400"/>
-            <a:ext cx="7863840" cy="3657600"/>
-          </a:xfrm>
-          <a:prstGeom prst="rect">
-            <a:avLst/>
-          </a:prstGeom>
           <a:noFill/>
           <a:ln/>
         </p:spPr>
         <p:txBody>
-          <a:bodyPr wrap="square" rtlCol="0" anchor="ctr"/>
-          <a:lstStyle/>
-          <a:p>
-            <a:pPr indent="0" marL="0">
-              <a:buNone/>
-            </a:pPr>
-            <a:r>
-              <a:rPr lang="en-US" sz="1100" dirty="0">
-                <a:solidFill>
-                  <a:srgbClr val="64748B"/>
-                </a:solidFill>
-                <a:latin typeface="Consolas" pitchFamily="34" charset="0"/>
-                <a:ea typeface="Consolas" pitchFamily="34" charset="-122"/>
-                <a:cs typeface="Consolas" pitchFamily="34" charset="-120"/>
-              </a:rPr>
-              <a:t>// Version 1 : ArrayList</a:t>
-            </a:r>
-            <a:endParaRPr lang="en-US" sz="1100" dirty="0"/>
-          </a:p>
-          <a:p>
-            <a:pPr indent="0" marL="0">
-              <a:buNone/>
-            </a:pPr>
-            <a:r>
-              <a:rPr lang="en-US" sz="1100" dirty="0">
-                <a:solidFill>
-                  <a:srgbClr val="7C3AED"/>
-                </a:solidFill>
-                <a:latin typeface="Consolas" pitchFamily="34" charset="0"/>
-                <a:ea typeface="Consolas" pitchFamily="34" charset="-122"/>
-                <a:cs typeface="Consolas" pitchFamily="34" charset="-120"/>
-              </a:rPr>
-              <a:t>public class ContactList {</a:t>
-            </a:r>
-            <a:endParaRPr lang="en-US" sz="1100" dirty="0"/>
-          </a:p>
-          <a:p>
-            <a:pPr indent="0" marL="0">
-              <a:buNone/>
-            </a:pPr>
-            <a:r>
-              <a:rPr lang="en-US" sz="1100" dirty="0">
-                <a:solidFill>
-                  <a:srgbClr val="7C3AED"/>
-                </a:solidFill>
-                <a:latin typeface="Consolas" pitchFamily="34" charset="0"/>
-                <a:ea typeface="Consolas" pitchFamily="34" charset="-122"/>
-                <a:cs typeface="Consolas" pitchFamily="34" charset="-120"/>
-              </a:rPr>
-              <a:t>    private ArrayList&lt;Contact&gt; contacts; // CACHÉ</a:t>
-            </a:r>
-            <a:endParaRPr lang="en-US" sz="1100" dirty="0"/>
-          </a:p>
-          <a:p>
-            <a:pPr indent="0" marL="0">
-              <a:buNone/>
-            </a:pPr>
-            <a:r>
-              <a:rPr lang="en-US" sz="1100" dirty="0">
+          <a:bodyPr wrap="square" rtlCol="0" anchor="t"/>
+          <a:lstStyle/>
+          <a:p>
+            <a:pPr marL="342900" indent="-342900">
+              <a:lnSpc>
+                <a:spcPct val="130000"/>
+              </a:lnSpc>
+              <a:buSzPct val="100000"/>
+              <a:buChar char="•"/>
+            </a:pPr>
+            <a:r>
+              <a:rPr lang="en-US" sz="1400" dirty="0">
                 <a:solidFill>
                   <a:srgbClr val="E2E8F0"/>
                 </a:solidFill>
-                <a:latin typeface="Consolas" pitchFamily="34" charset="0"/>
-                <a:ea typeface="Consolas" pitchFamily="34" charset="-122"/>
-                <a:cs typeface="Consolas" pitchFamily="34" charset="-120"/>
-              </a:rPr>
-              <a:t>    </a:t>
-            </a:r>
-            <a:endParaRPr lang="en-US" sz="1100" dirty="0"/>
-          </a:p>
-          <a:p>
-            <a:pPr indent="0" marL="0">
-              <a:buNone/>
-            </a:pPr>
-            <a:r>
-              <a:rPr lang="en-US" sz="1100" dirty="0">
-                <a:solidFill>
-                  <a:srgbClr val="7C3AED"/>
-                </a:solidFill>
-                <a:latin typeface="Consolas" pitchFamily="34" charset="0"/>
-                <a:ea typeface="Consolas" pitchFamily="34" charset="-122"/>
-                <a:cs typeface="Consolas" pitchFamily="34" charset="-120"/>
-              </a:rPr>
-              <a:t>    public void ajouter(Contact c) {</a:t>
-            </a:r>
-            <a:endParaRPr lang="en-US" sz="1100" dirty="0"/>
-          </a:p>
-          <a:p>
-            <a:pPr indent="0" marL="0">
-              <a:buNone/>
-            </a:pPr>
-            <a:r>
-              <a:rPr lang="en-US" sz="1100" dirty="0">
+                <a:latin typeface="Calibri" pitchFamily="34" charset="0"/>
+                <a:ea typeface="Calibri" pitchFamily="34" charset="-122"/>
+                <a:cs typeface="Calibri" pitchFamily="34" charset="-120"/>
+              </a:rPr>
+              <a:t>Cacher les DÉTAILS D'IMPLÉMENTATION</a:t>
+            </a:r>
+            <a:endParaRPr lang="en-US" sz="1400" dirty="0"/>
+          </a:p>
+          <a:p>
+            <a:pPr marL="342900" indent="-342900">
+              <a:lnSpc>
+                <a:spcPct val="130000"/>
+              </a:lnSpc>
+              <a:buSzPct val="100000"/>
+              <a:buChar char="•"/>
+            </a:pPr>
+            <a:r>
+              <a:rPr lang="en-US" sz="1400" dirty="0">
                 <a:solidFill>
                   <a:srgbClr val="E2E8F0"/>
                 </a:solidFill>
-                <a:latin typeface="Consolas" pitchFamily="34" charset="0"/>
-                <a:ea typeface="Consolas" pitchFamily="34" charset="-122"/>
-                <a:cs typeface="Consolas" pitchFamily="34" charset="-120"/>
-              </a:rPr>
-              <a:t>        contacts.add(c);</a:t>
-            </a:r>
-            <a:endParaRPr lang="en-US" sz="1100" dirty="0"/>
-          </a:p>
-          <a:p>
-            <a:pPr indent="0" marL="0">
-              <a:buNone/>
-            </a:pPr>
-            <a:r>
-              <a:rPr lang="en-US" sz="1100" dirty="0">
+                <a:latin typeface="Calibri" pitchFamily="34" charset="0"/>
+                <a:ea typeface="Calibri" pitchFamily="34" charset="-122"/>
+                <a:cs typeface="Calibri" pitchFamily="34" charset="-120"/>
+              </a:rPr>
+              <a:t>Exposer uniquement l'INTERFACE PUBLIQUE</a:t>
+            </a:r>
+            <a:endParaRPr lang="en-US" sz="1400" dirty="0"/>
+          </a:p>
+          <a:p>
+            <a:pPr marL="342900" indent="-342900">
+              <a:lnSpc>
+                <a:spcPct val="130000"/>
+              </a:lnSpc>
+              <a:buSzPct val="100000"/>
+              <a:buChar char="•"/>
+            </a:pPr>
+            <a:r>
+              <a:rPr lang="en-US" sz="1400" dirty="0">
                 <a:solidFill>
                   <a:srgbClr val="E2E8F0"/>
                 </a:solidFill>
-                <a:latin typeface="Consolas" pitchFamily="34" charset="0"/>
-                <a:ea typeface="Consolas" pitchFamily="34" charset="-122"/>
-                <a:cs typeface="Consolas" pitchFamily="34" charset="-120"/>
-              </a:rPr>
-              <a:t>    }</a:t>
-            </a:r>
-            <a:endParaRPr lang="en-US" sz="1100" dirty="0"/>
-          </a:p>
-          <a:p>
-            <a:pPr indent="0" marL="0">
-              <a:buNone/>
-            </a:pPr>
-            <a:r>
-              <a:rPr lang="en-US" sz="1100" dirty="0">
-                <a:solidFill>
-                  <a:srgbClr val="7C3AED"/>
-                </a:solidFill>
-                <a:latin typeface="Consolas" pitchFamily="34" charset="0"/>
-                <a:ea typeface="Consolas" pitchFamily="34" charset="-122"/>
-                <a:cs typeface="Consolas" pitchFamily="34" charset="-120"/>
-              </a:rPr>
-              <a:t>    public Contact chercher(String email) {</a:t>
-            </a:r>
-            <a:endParaRPr lang="en-US" sz="1100" dirty="0"/>
-          </a:p>
-          <a:p>
-            <a:pPr indent="0" marL="0">
-              <a:buNone/>
-            </a:pPr>
-            <a:r>
-              <a:rPr lang="en-US" sz="1100" dirty="0">
+                <a:latin typeface="Calibri" pitchFamily="34" charset="0"/>
+                <a:ea typeface="Calibri" pitchFamily="34" charset="-122"/>
+                <a:cs typeface="Calibri" pitchFamily="34" charset="-120"/>
+              </a:rPr>
+              <a:t>Principe de Parnas (1972) : chaque module cache une décision de conception</a:t>
+            </a:r>
+            <a:endParaRPr lang="en-US" sz="1400" dirty="0"/>
+          </a:p>
+          <a:p>
+            <a:pPr marL="342900" indent="-342900">
+              <a:lnSpc>
+                <a:spcPct val="130000"/>
+              </a:lnSpc>
+              <a:buSzPct val="100000"/>
+              <a:buChar char="•"/>
+            </a:pPr>
+            <a:r>
+              <a:rPr lang="en-US" sz="1400" dirty="0">
                 <a:solidFill>
                   <a:srgbClr val="E2E8F0"/>
                 </a:solidFill>
-                <a:latin typeface="Consolas" pitchFamily="34" charset="0"/>
-                <a:ea typeface="Consolas" pitchFamily="34" charset="-122"/>
-                <a:cs typeface="Consolas" pitchFamily="34" charset="-120"/>
-              </a:rPr>
-              <a:t>        for (Contact c : contacts)</a:t>
-            </a:r>
-            <a:endParaRPr lang="en-US" sz="1100" dirty="0"/>
-          </a:p>
-          <a:p>
-            <a:pPr indent="0" marL="0">
-              <a:buNone/>
-            </a:pPr>
-            <a:r>
-              <a:rPr lang="en-US" sz="1100" dirty="0">
+                <a:latin typeface="Calibri" pitchFamily="34" charset="0"/>
+                <a:ea typeface="Calibri" pitchFamily="34" charset="-122"/>
+                <a:cs typeface="Calibri" pitchFamily="34" charset="-120"/>
+              </a:rPr>
+              <a:t>Visibilité en Java : public &gt; protected &gt; package &gt; private</a:t>
+            </a:r>
+            <a:endParaRPr lang="en-US" sz="1400" dirty="0"/>
+          </a:p>
+          <a:p>
+            <a:pPr marL="342900" indent="-342900">
+              <a:lnSpc>
+                <a:spcPct val="130000"/>
+              </a:lnSpc>
+              <a:buSzPct val="100000"/>
+              <a:buChar char="•"/>
+            </a:pPr>
+            <a:r>
+              <a:rPr lang="en-US" sz="1400" dirty="0">
                 <a:solidFill>
                   <a:srgbClr val="E2E8F0"/>
                 </a:solidFill>
-                <a:latin typeface="Consolas" pitchFamily="34" charset="0"/>
-                <a:ea typeface="Consolas" pitchFamily="34" charset="-122"/>
-                <a:cs typeface="Consolas" pitchFamily="34" charset="-120"/>
-              </a:rPr>
-              <a:t>            if (c.getEmail().equals(email)) return c;</a:t>
-            </a:r>
-            <a:endParaRPr lang="en-US" sz="1100" dirty="0"/>
-          </a:p>
-          <a:p>
-            <a:pPr indent="0" marL="0">
-              <a:buNone/>
-            </a:pPr>
-            <a:r>
-              <a:rPr lang="en-US" sz="1100" dirty="0">
-                <a:solidFill>
-                  <a:srgbClr val="E2E8F0"/>
-                </a:solidFill>
-                <a:latin typeface="Consolas" pitchFamily="34" charset="0"/>
-                <a:ea typeface="Consolas" pitchFamily="34" charset="-122"/>
-                <a:cs typeface="Consolas" pitchFamily="34" charset="-120"/>
-              </a:rPr>
-              <a:t>        return null;</a:t>
-            </a:r>
-            <a:endParaRPr lang="en-US" sz="1100" dirty="0"/>
-          </a:p>
-          <a:p>
-            <a:pPr indent="0" marL="0">
-              <a:buNone/>
-            </a:pPr>
-            <a:r>
-              <a:rPr lang="en-US" sz="1100" dirty="0">
-                <a:solidFill>
-                  <a:srgbClr val="E2E8F0"/>
-                </a:solidFill>
-                <a:latin typeface="Consolas" pitchFamily="34" charset="0"/>
-                <a:ea typeface="Consolas" pitchFamily="34" charset="-122"/>
-                <a:cs typeface="Consolas" pitchFamily="34" charset="-120"/>
-              </a:rPr>
-              <a:t>    }</a:t>
-            </a:r>
-            <a:endParaRPr lang="en-US" sz="1100" dirty="0"/>
-          </a:p>
-          <a:p>
-            <a:pPr indent="0" marL="0">
-              <a:buNone/>
-            </a:pPr>
-            <a:r>
-              <a:rPr lang="en-US" sz="1100" dirty="0">
-                <a:solidFill>
-                  <a:srgbClr val="E2E8F0"/>
-                </a:solidFill>
-                <a:latin typeface="Consolas" pitchFamily="34" charset="0"/>
-                <a:ea typeface="Consolas" pitchFamily="34" charset="-122"/>
-                <a:cs typeface="Consolas" pitchFamily="34" charset="-120"/>
-              </a:rPr>
-              <a:t>}</a:t>
-            </a:r>
-            <a:endParaRPr lang="en-US" sz="1100" dirty="0"/>
-          </a:p>
-          <a:p>
-            <a:pPr indent="0" marL="0">
-              <a:buNone/>
-            </a:pPr>
-            <a:endParaRPr lang="en-US" sz="1100" dirty="0"/>
-          </a:p>
-          <a:p>
-            <a:pPr indent="0" marL="0">
-              <a:buNone/>
-            </a:pPr>
-            <a:r>
-              <a:rPr lang="en-US" sz="1100" dirty="0">
-                <a:solidFill>
-                  <a:srgbClr val="64748B"/>
-                </a:solidFill>
-                <a:latin typeface="Consolas" pitchFamily="34" charset="0"/>
-                <a:ea typeface="Consolas" pitchFamily="34" charset="-122"/>
-                <a:cs typeface="Consolas" pitchFamily="34" charset="-120"/>
-              </a:rPr>
-              <a:t>// Version 2 : HashMap (PLUS RAPIDE)</a:t>
-            </a:r>
-            <a:endParaRPr lang="en-US" sz="1100" dirty="0"/>
-          </a:p>
-          <a:p>
-            <a:pPr indent="0" marL="0">
-              <a:buNone/>
-            </a:pPr>
-            <a:r>
-              <a:rPr lang="en-US" sz="1100" dirty="0">
-                <a:solidFill>
-                  <a:srgbClr val="7C3AED"/>
-                </a:solidFill>
-                <a:latin typeface="Consolas" pitchFamily="34" charset="0"/>
-                <a:ea typeface="Consolas" pitchFamily="34" charset="-122"/>
-                <a:cs typeface="Consolas" pitchFamily="34" charset="-120"/>
-              </a:rPr>
-              <a:t>public class ContactList {</a:t>
-            </a:r>
-            <a:endParaRPr lang="en-US" sz="1100" dirty="0"/>
-          </a:p>
-          <a:p>
-            <a:pPr indent="0" marL="0">
-              <a:buNone/>
-            </a:pPr>
-            <a:r>
-              <a:rPr lang="en-US" sz="1100" dirty="0">
-                <a:solidFill>
-                  <a:srgbClr val="7C3AED"/>
-                </a:solidFill>
-                <a:latin typeface="Consolas" pitchFamily="34" charset="0"/>
-                <a:ea typeface="Consolas" pitchFamily="34" charset="-122"/>
-                <a:cs typeface="Consolas" pitchFamily="34" charset="-120"/>
-              </a:rPr>
-              <a:t>    private HashMap&lt;String,Contact&gt; contacts; // CHANGÉ !</a:t>
-            </a:r>
-            <a:endParaRPr lang="en-US" sz="1100" dirty="0"/>
-          </a:p>
-          <a:p>
-            <a:pPr indent="0" marL="0">
-              <a:buNone/>
-            </a:pPr>
-            <a:r>
-              <a:rPr lang="en-US" sz="1100" dirty="0">
-                <a:solidFill>
-                  <a:srgbClr val="E2E8F0"/>
-                </a:solidFill>
-                <a:latin typeface="Consolas" pitchFamily="34" charset="0"/>
-                <a:ea typeface="Consolas" pitchFamily="34" charset="-122"/>
-                <a:cs typeface="Consolas" pitchFamily="34" charset="-120"/>
-              </a:rPr>
-              <a:t>    </a:t>
-            </a:r>
-            <a:endParaRPr lang="en-US" sz="1100" dirty="0"/>
-          </a:p>
-          <a:p>
-            <a:pPr indent="0" marL="0">
-              <a:buNone/>
-            </a:pPr>
-            <a:r>
-              <a:rPr lang="en-US" sz="1100" dirty="0">
-                <a:solidFill>
-                  <a:srgbClr val="7C3AED"/>
-                </a:solidFill>
-                <a:latin typeface="Consolas" pitchFamily="34" charset="0"/>
-                <a:ea typeface="Consolas" pitchFamily="34" charset="-122"/>
-                <a:cs typeface="Consolas" pitchFamily="34" charset="-120"/>
-              </a:rPr>
-              <a:t>    public void ajouter(Contact c) {</a:t>
-            </a:r>
-            <a:endParaRPr lang="en-US" sz="1100" dirty="0"/>
-          </a:p>
-          <a:p>
-            <a:pPr indent="0" marL="0">
-              <a:buNone/>
-            </a:pPr>
-            <a:r>
-              <a:rPr lang="en-US" sz="1100" dirty="0">
-                <a:solidFill>
-                  <a:srgbClr val="E2E8F0"/>
-                </a:solidFill>
-                <a:latin typeface="Consolas" pitchFamily="34" charset="0"/>
-                <a:ea typeface="Consolas" pitchFamily="34" charset="-122"/>
-                <a:cs typeface="Consolas" pitchFamily="34" charset="-120"/>
-              </a:rPr>
-              <a:t>        contacts.put(c.getEmail(), c); // changé en interne</a:t>
-            </a:r>
-            <a:endParaRPr lang="en-US" sz="1100" dirty="0"/>
-          </a:p>
-          <a:p>
-            <a:pPr indent="0" marL="0">
-              <a:buNone/>
-            </a:pPr>
-            <a:r>
-              <a:rPr lang="en-US" sz="1100" dirty="0">
-                <a:solidFill>
-                  <a:srgbClr val="E2E8F0"/>
-                </a:solidFill>
-                <a:latin typeface="Consolas" pitchFamily="34" charset="0"/>
-                <a:ea typeface="Consolas" pitchFamily="34" charset="-122"/>
-                <a:cs typeface="Consolas" pitchFamily="34" charset="-120"/>
-              </a:rPr>
-              <a:t>    }</a:t>
-            </a:r>
-            <a:endParaRPr lang="en-US" sz="1100" dirty="0"/>
-          </a:p>
-          <a:p>
-            <a:pPr indent="0" marL="0">
-              <a:buNone/>
-            </a:pPr>
-            <a:r>
-              <a:rPr lang="en-US" sz="1100" dirty="0">
-                <a:solidFill>
-                  <a:srgbClr val="7C3AED"/>
-                </a:solidFill>
-                <a:latin typeface="Consolas" pitchFamily="34" charset="0"/>
-                <a:ea typeface="Consolas" pitchFamily="34" charset="-122"/>
-                <a:cs typeface="Consolas" pitchFamily="34" charset="-120"/>
-              </a:rPr>
-              <a:t>    public Contact chercher(String email) {</a:t>
-            </a:r>
-            <a:endParaRPr lang="en-US" sz="1100" dirty="0"/>
-          </a:p>
-          <a:p>
-            <a:pPr indent="0" marL="0">
-              <a:buNone/>
-            </a:pPr>
-            <a:r>
-              <a:rPr lang="en-US" sz="1100" dirty="0">
-                <a:solidFill>
-                  <a:srgbClr val="E2E8F0"/>
-                </a:solidFill>
-                <a:latin typeface="Consolas" pitchFamily="34" charset="0"/>
-                <a:ea typeface="Consolas" pitchFamily="34" charset="-122"/>
-                <a:cs typeface="Consolas" pitchFamily="34" charset="-120"/>
-              </a:rPr>
-              <a:t>        return contacts.get(email); // O(1) au lieu de O(n)</a:t>
-            </a:r>
-            <a:endParaRPr lang="en-US" sz="1100" dirty="0"/>
-          </a:p>
-          <a:p>
-            <a:pPr indent="0" marL="0">
-              <a:buNone/>
-            </a:pPr>
-            <a:r>
-              <a:rPr lang="en-US" sz="1100" dirty="0">
-                <a:solidFill>
-                  <a:srgbClr val="E2E8F0"/>
-                </a:solidFill>
-                <a:latin typeface="Consolas" pitchFamily="34" charset="0"/>
-                <a:ea typeface="Consolas" pitchFamily="34" charset="-122"/>
-                <a:cs typeface="Consolas" pitchFamily="34" charset="-120"/>
-              </a:rPr>
-              <a:t>    }</a:t>
-            </a:r>
-            <a:endParaRPr lang="en-US" sz="1100" dirty="0"/>
-          </a:p>
-          <a:p>
-            <a:pPr indent="0" marL="0">
-              <a:buNone/>
-            </a:pPr>
-            <a:r>
-              <a:rPr lang="en-US" sz="1100" dirty="0">
-                <a:solidFill>
-                  <a:srgbClr val="E2E8F0"/>
-                </a:solidFill>
-                <a:latin typeface="Consolas" pitchFamily="34" charset="0"/>
-                <a:ea typeface="Consolas" pitchFamily="34" charset="-122"/>
-                <a:cs typeface="Consolas" pitchFamily="34" charset="-120"/>
-              </a:rPr>
-              <a:t>}</a:t>
-            </a:r>
-            <a:endParaRPr lang="en-US" sz="1100" dirty="0"/>
-          </a:p>
-          <a:p>
-            <a:pPr indent="0" marL="0">
-              <a:buNone/>
-            </a:pPr>
-            <a:r>
-              <a:rPr lang="en-US" sz="1100" dirty="0">
-                <a:solidFill>
-                  <a:srgbClr val="64748B"/>
-                </a:solidFill>
-                <a:latin typeface="Consolas" pitchFamily="34" charset="0"/>
-                <a:ea typeface="Consolas" pitchFamily="34" charset="-122"/>
-                <a:cs typeface="Consolas" pitchFamily="34" charset="-120"/>
-              </a:rPr>
-              <a:t>// Le code CLIENT ne change PAS ! Seul l'intérieur change.</a:t>
-            </a:r>
-            <a:endParaRPr lang="en-US" sz="1100" dirty="0"/>
+                <a:latin typeface="Calibri" pitchFamily="34" charset="0"/>
+                <a:ea typeface="Calibri" pitchFamily="34" charset="-122"/>
+                <a:cs typeface="Calibri" pitchFamily="34" charset="-120"/>
+              </a:rPr>
+              <a:t>Minimiser les dépendances entre classes</a:t>
+            </a:r>
+            <a:endParaRPr lang="en-US" sz="1400" dirty="0"/>
           </a:p>
         </p:txBody>
       </p:sp>
@@ -2812,7 +2774,7 @@
     <p:bg>
       <p:bgPr>
         <a:solidFill>
-          <a:srgbClr val="F8FAFC"/>
+          <a:srgbClr val="0B2027"/>
         </a:solidFill>
       </p:bgPr>
     </p:bg>
@@ -2839,13 +2801,13 @@
         <p:spPr>
           <a:xfrm>
             <a:off x="0" y="0"/>
-            <a:ext cx="109728" cy="5143500"/>
+            <a:ext cx="9144000" cy="54864"/>
           </a:xfrm>
           <a:prstGeom prst="rect">
             <a:avLst/>
           </a:prstGeom>
           <a:solidFill>
-            <a:srgbClr val="028090"/>
+            <a:srgbClr val="0891B2"/>
           </a:solidFill>
           <a:ln/>
         </p:spPr>
@@ -2858,7 +2820,7 @@
         </p:nvSpPr>
         <p:spPr>
           <a:xfrm>
-            <a:off x="457200" y="274320"/>
+            <a:off x="548640" y="274320"/>
             <a:ext cx="8229600" cy="548640"/>
           </a:xfrm>
           <a:prstGeom prst="rect">
@@ -2875,17 +2837,17 @@
               <a:buNone/>
             </a:pPr>
             <a:r>
-              <a:rPr lang="en-US" sz="2600" b="1" dirty="0">
-                <a:solidFill>
-                  <a:srgbClr val="1B2A4A"/>
-                </a:solidFill>
-                <a:latin typeface="Trebuchet MS" pitchFamily="34" charset="0"/>
-                <a:ea typeface="Trebuchet MS" pitchFamily="34" charset="-122"/>
-                <a:cs typeface="Trebuchet MS" pitchFamily="34" charset="-120"/>
-              </a:rPr>
-              <a:t>Les 4 avantages de l'encapsulation dans les ADT</a:t>
-            </a:r>
-            <a:endParaRPr lang="en-US" sz="2600" dirty="0"/>
+              <a:rPr lang="en-US" sz="2400" b="1" dirty="0">
+                <a:solidFill>
+                  <a:srgbClr val="FFFFFF"/>
+                </a:solidFill>
+                <a:latin typeface="Calibri" pitchFamily="34" charset="0"/>
+                <a:ea typeface="Calibri" pitchFamily="34" charset="-122"/>
+                <a:cs typeface="Calibri" pitchFamily="34" charset="-120"/>
+              </a:rPr>
+              <a:t>Les 4 niveaux de visibilité Java</a:t>
+            </a:r>
+            <a:endParaRPr lang="en-US" sz="2400" dirty="0"/>
           </a:p>
         </p:txBody>
       </p:sp>
@@ -2897,8 +2859,8 @@
         </p:nvSpPr>
         <p:spPr>
           <a:xfrm>
-            <a:off x="640080" y="1005840"/>
-            <a:ext cx="7772400" cy="457200"/>
+            <a:off x="548640" y="1005840"/>
+            <a:ext cx="3840480" cy="3200400"/>
           </a:xfrm>
           <a:prstGeom prst="rect">
             <a:avLst/>
@@ -2907,7 +2869,7 @@
           <a:ln/>
         </p:spPr>
         <p:txBody>
-          <a:bodyPr wrap="square" rtlCol="0" anchor="ctr"/>
+          <a:bodyPr wrap="square" rtlCol="0" anchor="t"/>
           <a:lstStyle/>
           <a:p>
             <a:pPr marL="342900" indent="-342900">
@@ -2915,190 +2877,124 @@
               <a:buChar char="•"/>
             </a:pPr>
             <a:r>
-              <a:rPr lang="en-US" sz="1400" dirty="0">
-                <a:solidFill>
-                  <a:srgbClr val="334155"/>
-                </a:solidFill>
-                <a:latin typeface="Calibri" pitchFamily="34" charset="0"/>
-                <a:ea typeface="Calibri" pitchFamily="34" charset="-122"/>
-                <a:cs typeface="Calibri" pitchFamily="34" charset="-120"/>
-              </a:rPr>
-              <a:t>1. MODULARITÉ : chaque ADT est une unité indépendante, testable séparément</a:t>
-            </a:r>
-            <a:endParaRPr lang="en-US" sz="1400" dirty="0"/>
-          </a:p>
-        </p:txBody>
-      </p:sp>
-      <p:sp>
-        <p:nvSpPr>
-          <p:cNvPr id="5" name="Text 3"/>
-          <p:cNvSpPr/>
-          <p:nvPr/>
-        </p:nvSpPr>
-        <p:spPr>
-          <a:xfrm>
-            <a:off x="640080" y="1554480"/>
-            <a:ext cx="7772400" cy="457200"/>
-          </a:xfrm>
-          <a:prstGeom prst="rect">
-            <a:avLst/>
-          </a:prstGeom>
-          <a:noFill/>
-          <a:ln/>
-        </p:spPr>
-        <p:txBody>
-          <a:bodyPr wrap="square" rtlCol="0" anchor="ctr"/>
-          <a:lstStyle/>
+              <a:rPr lang="en-US" sz="1300" dirty="0">
+                <a:solidFill>
+                  <a:srgbClr val="E2E8F0"/>
+                </a:solidFill>
+                <a:latin typeface="Calibri" pitchFamily="34" charset="0"/>
+                <a:ea typeface="Calibri" pitchFamily="34" charset="-122"/>
+                <a:cs typeface="Calibri" pitchFamily="34" charset="-120"/>
+              </a:rPr>
+              <a:t>public : accessible par TOUT LE MONDE</a:t>
+            </a:r>
+            <a:endParaRPr lang="en-US" sz="1300" dirty="0"/>
+          </a:p>
           <a:p>
             <a:pPr marL="342900" indent="-342900">
               <a:buSzPct val="100000"/>
               <a:buChar char="•"/>
             </a:pPr>
             <a:r>
-              <a:rPr lang="en-US" sz="1400" dirty="0">
-                <a:solidFill>
-                  <a:srgbClr val="334155"/>
-                </a:solidFill>
-                <a:latin typeface="Calibri" pitchFamily="34" charset="0"/>
-                <a:ea typeface="Calibri" pitchFamily="34" charset="-122"/>
-                <a:cs typeface="Calibri" pitchFamily="34" charset="-120"/>
-              </a:rPr>
-              <a:t>2. MAINTENABILITÉ : changer l'implémentation sans toucher au code qui l'utilise</a:t>
-            </a:r>
-            <a:endParaRPr lang="en-US" sz="1400" dirty="0"/>
-          </a:p>
-        </p:txBody>
-      </p:sp>
-      <p:sp>
-        <p:nvSpPr>
-          <p:cNvPr id="6" name="Text 4"/>
-          <p:cNvSpPr/>
-          <p:nvPr/>
-        </p:nvSpPr>
-        <p:spPr>
-          <a:xfrm>
-            <a:off x="640080" y="2103120"/>
-            <a:ext cx="7772400" cy="457200"/>
-          </a:xfrm>
-          <a:prstGeom prst="rect">
-            <a:avLst/>
-          </a:prstGeom>
-          <a:noFill/>
-          <a:ln/>
-        </p:spPr>
-        <p:txBody>
-          <a:bodyPr wrap="square" rtlCol="0" anchor="ctr"/>
-          <a:lstStyle/>
+              <a:rPr lang="en-US" sz="1300" dirty="0">
+                <a:solidFill>
+                  <a:srgbClr val="E2E8F0"/>
+                </a:solidFill>
+                <a:latin typeface="Calibri" pitchFamily="34" charset="0"/>
+                <a:ea typeface="Calibri" pitchFamily="34" charset="-122"/>
+                <a:cs typeface="Calibri" pitchFamily="34" charset="-120"/>
+              </a:rPr>
+              <a:t>protected : même package + sous-classes</a:t>
+            </a:r>
+            <a:endParaRPr lang="en-US" sz="1300" dirty="0"/>
+          </a:p>
           <a:p>
             <a:pPr marL="342900" indent="-342900">
               <a:buSzPct val="100000"/>
               <a:buChar char="•"/>
             </a:pPr>
             <a:r>
-              <a:rPr lang="en-US" sz="1400" dirty="0">
-                <a:solidFill>
-                  <a:srgbClr val="334155"/>
-                </a:solidFill>
-                <a:latin typeface="Calibri" pitchFamily="34" charset="0"/>
-                <a:ea typeface="Calibri" pitchFamily="34" charset="-122"/>
-                <a:cs typeface="Calibri" pitchFamily="34" charset="-120"/>
-              </a:rPr>
-              <a:t>3. SÉCURITÉ : les invariants sont protégés (pas de modification directe des données)</a:t>
-            </a:r>
-            <a:endParaRPr lang="en-US" sz="1400" dirty="0"/>
-          </a:p>
-        </p:txBody>
-      </p:sp>
-      <p:sp>
-        <p:nvSpPr>
-          <p:cNvPr id="7" name="Text 5"/>
-          <p:cNvSpPr/>
-          <p:nvPr/>
-        </p:nvSpPr>
-        <p:spPr>
-          <a:xfrm>
-            <a:off x="640080" y="2651760"/>
-            <a:ext cx="7772400" cy="457200"/>
-          </a:xfrm>
-          <a:prstGeom prst="rect">
-            <a:avLst/>
-          </a:prstGeom>
-          <a:noFill/>
-          <a:ln/>
-        </p:spPr>
-        <p:txBody>
-          <a:bodyPr wrap="square" rtlCol="0" anchor="ctr"/>
-          <a:lstStyle/>
+              <a:rPr lang="en-US" sz="1300" dirty="0">
+                <a:solidFill>
+                  <a:srgbClr val="E2E8F0"/>
+                </a:solidFill>
+                <a:latin typeface="Calibri" pitchFamily="34" charset="0"/>
+                <a:ea typeface="Calibri" pitchFamily="34" charset="-122"/>
+                <a:cs typeface="Calibri" pitchFamily="34" charset="-120"/>
+              </a:rPr>
+              <a:t>default (package) : même package uniquement</a:t>
+            </a:r>
+            <a:endParaRPr lang="en-US" sz="1300" dirty="0"/>
+          </a:p>
           <a:p>
             <a:pPr marL="342900" indent="-342900">
               <a:buSzPct val="100000"/>
               <a:buChar char="•"/>
             </a:pPr>
             <a:r>
-              <a:rPr lang="en-US" sz="1400" dirty="0">
-                <a:solidFill>
-                  <a:srgbClr val="334155"/>
-                </a:solidFill>
-                <a:latin typeface="Calibri" pitchFamily="34" charset="0"/>
-                <a:ea typeface="Calibri" pitchFamily="34" charset="-122"/>
-                <a:cs typeface="Calibri" pitchFamily="34" charset="-120"/>
-              </a:rPr>
-              <a:t>4. RÉUTILISABILITÉ : un ADT bien encapsulé peut être réutilisé dans différents projets</a:t>
-            </a:r>
-            <a:endParaRPr lang="en-US" sz="1400" dirty="0"/>
-          </a:p>
-        </p:txBody>
-      </p:sp>
-      <p:sp>
-        <p:nvSpPr>
-          <p:cNvPr id="8" name="Text 6"/>
-          <p:cNvSpPr/>
-          <p:nvPr/>
-        </p:nvSpPr>
-        <p:spPr>
-          <a:xfrm>
-            <a:off x="640080" y="3200400"/>
-            <a:ext cx="7772400" cy="457200"/>
-          </a:xfrm>
-          <a:prstGeom prst="rect">
-            <a:avLst/>
-          </a:prstGeom>
-          <a:noFill/>
-          <a:ln/>
-        </p:spPr>
-        <p:txBody>
-          <a:bodyPr wrap="square" rtlCol="0" anchor="ctr"/>
-          <a:lstStyle/>
+              <a:rPr lang="en-US" sz="1300" dirty="0">
+                <a:solidFill>
+                  <a:srgbClr val="E2E8F0"/>
+                </a:solidFill>
+                <a:latin typeface="Calibri" pitchFamily="34" charset="0"/>
+                <a:ea typeface="Calibri" pitchFamily="34" charset="-122"/>
+                <a:cs typeface="Calibri" pitchFamily="34" charset="-120"/>
+              </a:rPr>
+              <a:t>private : classe elle-même UNIQUEMENT</a:t>
+            </a:r>
+            <a:endParaRPr lang="en-US" sz="1300" dirty="0"/>
+          </a:p>
           <a:p>
             <a:pPr marL="342900" indent="-342900">
               <a:buSzPct val="100000"/>
               <a:buChar char="•"/>
             </a:pPr>
             <a:r>
-              <a:rPr lang="en-US" sz="1400" dirty="0">
-                <a:solidFill>
-                  <a:srgbClr val="334155"/>
-                </a:solidFill>
-                <a:latin typeface="Calibri" pitchFamily="34" charset="0"/>
-                <a:ea typeface="Calibri" pitchFamily="34" charset="-122"/>
-                <a:cs typeface="Calibri" pitchFamily="34" charset="-120"/>
-              </a:rPr>
-              <a:t>En résumé : l'encapsulation rend le code plus FIABLE, MAINTENABLE et FLEXIBLE</a:t>
-            </a:r>
-            <a:endParaRPr lang="en-US" sz="1400" dirty="0"/>
-          </a:p>
-        </p:txBody>
-      </p:sp>
-      <p:sp>
-        <p:nvSpPr>
-          <p:cNvPr id="9" name="Text 7"/>
-          <p:cNvSpPr/>
-          <p:nvPr/>
-        </p:nvSpPr>
-        <p:spPr>
-          <a:xfrm>
-            <a:off x="640080" y="3749040"/>
-            <a:ext cx="7772400" cy="457200"/>
+              <a:rPr lang="en-US" sz="1300" dirty="0">
+                <a:solidFill>
+                  <a:srgbClr val="E2E8F0"/>
+                </a:solidFill>
+                <a:latin typeface="Calibri" pitchFamily="34" charset="0"/>
+                <a:ea typeface="Calibri" pitchFamily="34" charset="-122"/>
+                <a:cs typeface="Calibri" pitchFamily="34" charset="-120"/>
+              </a:rPr>
+              <a:t>Règle : attributs = private, méthodes = public/private selon besoin</a:t>
+            </a:r>
+            <a:endParaRPr lang="en-US" sz="1300" dirty="0"/>
+          </a:p>
+        </p:txBody>
+      </p:sp>
+      <p:sp>
+        <p:nvSpPr>
+          <p:cNvPr id="5" name="Shape 3"/>
+          <p:cNvSpPr/>
+          <p:nvPr/>
+        </p:nvSpPr>
+        <p:spPr>
+          <a:xfrm>
+            <a:off x="4754880" y="1005840"/>
+            <a:ext cx="4023360" cy="3200400"/>
+          </a:xfrm>
+          <a:prstGeom prst="roundRect">
+            <a:avLst>
+              <a:gd name="adj" fmla="val 2857"/>
+            </a:avLst>
+          </a:prstGeom>
+          <a:solidFill>
+            <a:srgbClr val="0D1117"/>
+          </a:solidFill>
+          <a:ln/>
+        </p:spPr>
+      </p:sp>
+      <p:sp>
+        <p:nvSpPr>
+          <p:cNvPr id="6" name="Text 4"/>
+          <p:cNvSpPr/>
+          <p:nvPr/>
+        </p:nvSpPr>
+        <p:spPr>
+          <a:xfrm>
+            <a:off x="4937760" y="1143000"/>
+            <a:ext cx="3657600" cy="2926080"/>
           </a:xfrm>
           <a:prstGeom prst="rect">
             <a:avLst/>
@@ -3107,25 +3003,183 @@
           <a:ln/>
         </p:spPr>
         <p:txBody>
-          <a:bodyPr wrap="square" rtlCol="0" anchor="ctr"/>
-          <a:lstStyle/>
-          <a:p>
-            <a:pPr marL="342900" indent="-342900">
-              <a:buSzPct val="100000"/>
-              <a:buChar char="•"/>
-            </a:pPr>
-            <a:r>
-              <a:rPr lang="en-US" sz="1400" dirty="0">
-                <a:solidFill>
-                  <a:srgbClr val="334155"/>
-                </a:solidFill>
-                <a:latin typeface="Calibri" pitchFamily="34" charset="0"/>
-                <a:ea typeface="Calibri" pitchFamily="34" charset="-122"/>
-                <a:cs typeface="Calibri" pitchFamily="34" charset="-120"/>
-              </a:rPr>
-              <a:t>C'est le fondement de la bonne ingénierie logicielle !</a:t>
-            </a:r>
-            <a:endParaRPr lang="en-US" sz="1400" dirty="0"/>
+          <a:bodyPr wrap="square" rtlCol="0" anchor="t"/>
+          <a:lstStyle/>
+          <a:p>
+            <a:pPr indent="0" marL="0">
+              <a:buNone/>
+            </a:pPr>
+            <a:r>
+              <a:rPr lang="en-US" sz="1000" dirty="0">
+                <a:solidFill>
+                  <a:srgbClr val="A5F3FC"/>
+                </a:solidFill>
+                <a:latin typeface="Consolas" pitchFamily="34" charset="0"/>
+                <a:ea typeface="Consolas" pitchFamily="34" charset="-122"/>
+                <a:cs typeface="Consolas" pitchFamily="34" charset="-120"/>
+              </a:rPr>
+              <a:t>Classe A (package1)</a:t>
+            </a:r>
+            <a:endParaRPr lang="en-US" sz="1000" dirty="0"/>
+          </a:p>
+          <a:p>
+            <a:pPr indent="0" marL="0">
+              <a:buNone/>
+            </a:pPr>
+            <a:r>
+              <a:rPr lang="en-US" sz="1000" dirty="0">
+                <a:solidFill>
+                  <a:srgbClr val="A5F3FC"/>
+                </a:solidFill>
+                <a:latin typeface="Consolas" pitchFamily="34" charset="0"/>
+                <a:ea typeface="Consolas" pitchFamily="34" charset="-122"/>
+                <a:cs typeface="Consolas" pitchFamily="34" charset="-120"/>
+              </a:rPr>
+              <a:t>├─ public    → visible partout</a:t>
+            </a:r>
+            <a:endParaRPr lang="en-US" sz="1000" dirty="0"/>
+          </a:p>
+          <a:p>
+            <a:pPr indent="0" marL="0">
+              <a:buNone/>
+            </a:pPr>
+            <a:r>
+              <a:rPr lang="en-US" sz="1000" dirty="0">
+                <a:solidFill>
+                  <a:srgbClr val="A5F3FC"/>
+                </a:solidFill>
+                <a:latin typeface="Consolas" pitchFamily="34" charset="0"/>
+                <a:ea typeface="Consolas" pitchFamily="34" charset="-122"/>
+                <a:cs typeface="Consolas" pitchFamily="34" charset="-120"/>
+              </a:rPr>
+              <a:t>├─ protected → package1 + enfants</a:t>
+            </a:r>
+            <a:endParaRPr lang="en-US" sz="1000" dirty="0"/>
+          </a:p>
+          <a:p>
+            <a:pPr indent="0" marL="0">
+              <a:buNone/>
+            </a:pPr>
+            <a:r>
+              <a:rPr lang="en-US" sz="1000" dirty="0">
+                <a:solidFill>
+                  <a:srgbClr val="A5F3FC"/>
+                </a:solidFill>
+                <a:latin typeface="Consolas" pitchFamily="34" charset="0"/>
+                <a:ea typeface="Consolas" pitchFamily="34" charset="-122"/>
+                <a:cs typeface="Consolas" pitchFamily="34" charset="-120"/>
+              </a:rPr>
+              <a:t>├─ default   → package1 seul</a:t>
+            </a:r>
+            <a:endParaRPr lang="en-US" sz="1000" dirty="0"/>
+          </a:p>
+          <a:p>
+            <a:pPr indent="0" marL="0">
+              <a:buNone/>
+            </a:pPr>
+            <a:r>
+              <a:rPr lang="en-US" sz="1000" dirty="0">
+                <a:solidFill>
+                  <a:srgbClr val="A5F3FC"/>
+                </a:solidFill>
+                <a:latin typeface="Consolas" pitchFamily="34" charset="0"/>
+                <a:ea typeface="Consolas" pitchFamily="34" charset="-122"/>
+                <a:cs typeface="Consolas" pitchFamily="34" charset="-120"/>
+              </a:rPr>
+              <a:t>└─ private   → A seul</a:t>
+            </a:r>
+            <a:endParaRPr lang="en-US" sz="1000" dirty="0"/>
+          </a:p>
+          <a:p>
+            <a:pPr indent="0" marL="0">
+              <a:buNone/>
+            </a:pPr>
+            <a:endParaRPr lang="en-US" sz="1000" dirty="0"/>
+          </a:p>
+          <a:p>
+            <a:pPr indent="0" marL="0">
+              <a:buNone/>
+            </a:pPr>
+            <a:r>
+              <a:rPr lang="en-US" sz="1000" dirty="0">
+                <a:solidFill>
+                  <a:srgbClr val="A5F3FC"/>
+                </a:solidFill>
+                <a:latin typeface="Consolas" pitchFamily="34" charset="0"/>
+                <a:ea typeface="Consolas" pitchFamily="34" charset="-122"/>
+                <a:cs typeface="Consolas" pitchFamily="34" charset="-120"/>
+              </a:rPr>
+              <a:t>Classe B (package2) extends A</a:t>
+            </a:r>
+            <a:endParaRPr lang="en-US" sz="1000" dirty="0"/>
+          </a:p>
+          <a:p>
+            <a:pPr indent="0" marL="0">
+              <a:buNone/>
+            </a:pPr>
+            <a:r>
+              <a:rPr lang="en-US" sz="1000" dirty="0">
+                <a:solidFill>
+                  <a:srgbClr val="A5F3FC"/>
+                </a:solidFill>
+                <a:latin typeface="Consolas" pitchFamily="34" charset="0"/>
+                <a:ea typeface="Consolas" pitchFamily="34" charset="-122"/>
+                <a:cs typeface="Consolas" pitchFamily="34" charset="-120"/>
+              </a:rPr>
+              <a:t>├─ voit public ✅</a:t>
+            </a:r>
+            <a:endParaRPr lang="en-US" sz="1000" dirty="0"/>
+          </a:p>
+          <a:p>
+            <a:pPr indent="0" marL="0">
+              <a:buNone/>
+            </a:pPr>
+            <a:r>
+              <a:rPr lang="en-US" sz="1000" dirty="0">
+                <a:solidFill>
+                  <a:srgbClr val="A5F3FC"/>
+                </a:solidFill>
+                <a:latin typeface="Consolas" pitchFamily="34" charset="0"/>
+                <a:ea typeface="Consolas" pitchFamily="34" charset="-122"/>
+                <a:cs typeface="Consolas" pitchFamily="34" charset="-120"/>
+              </a:rPr>
+              <a:t>├─ voit protected ✅</a:t>
+            </a:r>
+            <a:endParaRPr lang="en-US" sz="1000" dirty="0"/>
+          </a:p>
+          <a:p>
+            <a:pPr indent="0" marL="0">
+              <a:buNone/>
+            </a:pPr>
+            <a:r>
+              <a:rPr lang="en-US" sz="1000" dirty="0">
+                <a:solidFill>
+                  <a:srgbClr val="A5F3FC"/>
+                </a:solidFill>
+                <a:latin typeface="Consolas" pitchFamily="34" charset="0"/>
+                <a:ea typeface="Consolas" pitchFamily="34" charset="-122"/>
+                <a:cs typeface="Consolas" pitchFamily="34" charset="-120"/>
+              </a:rPr>
+              <a:t>├─ voit default ❌</a:t>
+            </a:r>
+            <a:endParaRPr lang="en-US" sz="1000" dirty="0"/>
+          </a:p>
+          <a:p>
+            <a:pPr indent="0" marL="0">
+              <a:buNone/>
+            </a:pPr>
+            <a:r>
+              <a:rPr lang="en-US" sz="1000" dirty="0">
+                <a:solidFill>
+                  <a:srgbClr val="A5F3FC"/>
+                </a:solidFill>
+                <a:latin typeface="Consolas" pitchFamily="34" charset="0"/>
+                <a:ea typeface="Consolas" pitchFamily="34" charset="-122"/>
+                <a:cs typeface="Consolas" pitchFamily="34" charset="-120"/>
+              </a:rPr>
+              <a:t>└─ voit private ❌</a:t>
+            </a:r>
+            <a:endParaRPr lang="en-US" sz="1000" dirty="0"/>
           </a:p>
         </p:txBody>
       </p:sp>
@@ -3143,7 +3197,7 @@
     <p:bg>
       <p:bgPr>
         <a:solidFill>
-          <a:srgbClr val="0F172A"/>
+          <a:srgbClr val="0B2027"/>
         </a:solidFill>
       </p:bgPr>
     </p:bg>
@@ -3170,13 +3224,13 @@
         <p:spPr>
           <a:xfrm>
             <a:off x="0" y="0"/>
-            <a:ext cx="9144000" cy="73152"/>
+            <a:ext cx="9144000" cy="54864"/>
           </a:xfrm>
           <a:prstGeom prst="rect">
             <a:avLst/>
           </a:prstGeom>
           <a:solidFill>
-            <a:srgbClr val="DC2626"/>
+            <a:srgbClr val="0891B2"/>
           </a:solidFill>
           <a:ln/>
         </p:spPr>
@@ -3189,8 +3243,8 @@
         </p:nvSpPr>
         <p:spPr>
           <a:xfrm>
-            <a:off x="457200" y="182880"/>
-            <a:ext cx="7315200" cy="457200"/>
+            <a:off x="548640" y="274320"/>
+            <a:ext cx="8229600" cy="548640"/>
           </a:xfrm>
           <a:prstGeom prst="rect">
             <a:avLst/>
@@ -3199,24 +3253,24 @@
           <a:ln/>
         </p:spPr>
         <p:txBody>
-          <a:bodyPr wrap="square" rtlCol="0" anchor="ctr"/>
+          <a:bodyPr wrap="square" lIns="0" tIns="0" rIns="0" bIns="0" rtlCol="0" anchor="ctr"/>
           <a:lstStyle/>
           <a:p>
             <a:pPr indent="0" marL="0">
               <a:buNone/>
             </a:pPr>
             <a:r>
-              <a:rPr lang="en-US" sz="2200" b="1" dirty="0">
-                <a:solidFill>
-                  <a:srgbClr val="DC2626"/>
-                </a:solidFill>
-                <a:latin typeface="Trebuchet MS" pitchFamily="34" charset="0"/>
-                <a:ea typeface="Trebuchet MS" pitchFamily="34" charset="-122"/>
-                <a:cs typeface="Trebuchet MS" pitchFamily="34" charset="-120"/>
-              </a:rPr>
-              <a:t>NOTES ENSEIGNANT — Ch.6 M3 Encapsulation</a:t>
-            </a:r>
-            <a:endParaRPr lang="en-US" sz="2200" dirty="0"/>
+              <a:rPr lang="en-US" sz="2400" b="1" dirty="0">
+                <a:solidFill>
+                  <a:srgbClr val="FFFFFF"/>
+                </a:solidFill>
+                <a:latin typeface="Calibri" pitchFamily="34" charset="0"/>
+                <a:ea typeface="Calibri" pitchFamily="34" charset="-122"/>
+                <a:cs typeface="Calibri" pitchFamily="34" charset="-120"/>
+              </a:rPr>
+              <a:t>Interfaces Java — Le contrat ADT</a:t>
+            </a:r>
+            <a:endParaRPr lang="en-US" sz="2400" dirty="0"/>
           </a:p>
         </p:txBody>
       </p:sp>
@@ -3228,8 +3282,8 @@
         </p:nvSpPr>
         <p:spPr>
           <a:xfrm>
-            <a:off x="457200" y="731520"/>
-            <a:ext cx="8229600" cy="4114800"/>
+            <a:off x="548640" y="1005840"/>
+            <a:ext cx="3840480" cy="3200400"/>
           </a:xfrm>
           <a:prstGeom prst="rect">
             <a:avLst/>
@@ -3238,38 +3292,15 @@
           <a:ln/>
         </p:spPr>
         <p:txBody>
-          <a:bodyPr wrap="square" rtlCol="0" anchor="ctr"/>
-          <a:lstStyle/>
-          <a:p>
-            <a:pPr indent="0" marL="0">
-              <a:buNone/>
-            </a:pPr>
-            <a:r>
-              <a:rPr lang="en-US" sz="1500" b="1" dirty="0">
-                <a:solidFill>
-                  <a:srgbClr val="00A896"/>
-                </a:solidFill>
-                <a:latin typeface="Trebuchet MS" pitchFamily="34" charset="0"/>
-                <a:ea typeface="Trebuchet MS" pitchFamily="34" charset="-122"/>
-                <a:cs typeface="Trebuchet MS" pitchFamily="34" charset="-120"/>
-              </a:rPr>
-              <a:t>Plan de séance :</a:t>
-            </a:r>
-            <a:endParaRPr lang="en-US" sz="1500" dirty="0"/>
-          </a:p>
-          <a:p>
-            <a:pPr indent="0" marL="0">
-              <a:buNone/>
-            </a:pPr>
-            <a:endParaRPr lang="en-US" sz="1500" dirty="0"/>
-          </a:p>
+          <a:bodyPr wrap="square" rtlCol="0" anchor="t"/>
+          <a:lstStyle/>
           <a:p>
             <a:pPr marL="342900" indent="-342900">
               <a:buSzPct val="100000"/>
               <a:buChar char="•"/>
             </a:pPr>
             <a:r>
-              <a:rPr lang="en-US" sz="1200" dirty="0">
+              <a:rPr lang="en-US" sz="1300" dirty="0">
                 <a:solidFill>
                   <a:srgbClr val="E2E8F0"/>
                 </a:solidFill>
@@ -3277,9 +3308,9 @@
                 <a:ea typeface="Calibri" pitchFamily="34" charset="-122"/>
                 <a:cs typeface="Calibri" pitchFamily="34" charset="-120"/>
               </a:rPr>
-              <a:t>P1 : Théorie encapsulation + information hiding avec exemples concrets</a:t>
-            </a:r>
-            <a:endParaRPr lang="en-US" sz="1500" dirty="0"/>
+              <a:t>Interface = CONTRAT sans implémentation</a:t>
+            </a:r>
+            <a:endParaRPr lang="en-US" sz="1300" dirty="0"/>
           </a:p>
           <a:p>
             <a:pPr marL="342900" indent="-342900">
@@ -3287,7 +3318,7 @@
               <a:buChar char="•"/>
             </a:pPr>
             <a:r>
-              <a:rPr lang="en-US" sz="1200" dirty="0">
+              <a:rPr lang="en-US" sz="1300" dirty="0">
                 <a:solidFill>
                   <a:srgbClr val="E2E8F0"/>
                 </a:solidFill>
@@ -3295,9 +3326,9 @@
                 <a:ea typeface="Calibri" pitchFamily="34" charset="-122"/>
                 <a:cs typeface="Calibri" pitchFamily="34" charset="-120"/>
               </a:rPr>
-              <a:t>P2 : Live coding — montrer le changement ArrayList→HashMap sans casser le client</a:t>
-            </a:r>
-            <a:endParaRPr lang="en-US" sz="1500" dirty="0"/>
+              <a:t>Définit le QUOI (signatures) sans le COMMENT</a:t>
+            </a:r>
+            <a:endParaRPr lang="en-US" sz="1300" dirty="0"/>
           </a:p>
           <a:p>
             <a:pPr marL="342900" indent="-342900">
@@ -3305,7 +3336,7 @@
               <a:buChar char="•"/>
             </a:pPr>
             <a:r>
-              <a:rPr lang="en-US" sz="1200" dirty="0">
+              <a:rPr lang="en-US" sz="1300" dirty="0">
                 <a:solidFill>
                   <a:srgbClr val="E2E8F0"/>
                 </a:solidFill>
@@ -3313,9 +3344,9 @@
                 <a:ea typeface="Calibri" pitchFamily="34" charset="-122"/>
                 <a:cs typeface="Calibri" pitchFamily="34" charset="-120"/>
               </a:rPr>
-              <a:t>P3 : Mini-jeu web + exercice guidé</a:t>
-            </a:r>
-            <a:endParaRPr lang="en-US" sz="1500" dirty="0"/>
+              <a:t>Une classe 'implements' une interface</a:t>
+            </a:r>
+            <a:endParaRPr lang="en-US" sz="1300" dirty="0"/>
           </a:p>
           <a:p>
             <a:pPr marL="342900" indent="-342900">
@@ -3323,7 +3354,7 @@
               <a:buChar char="•"/>
             </a:pPr>
             <a:r>
-              <a:rPr lang="en-US" sz="1200" dirty="0">
+              <a:rPr lang="en-US" sz="1300" dirty="0">
                 <a:solidFill>
                   <a:srgbClr val="E2E8F0"/>
                 </a:solidFill>
@@ -3331,32 +3362,9 @@
                 <a:ea typeface="Calibri" pitchFamily="34" charset="-122"/>
                 <a:cs typeface="Calibri" pitchFamily="34" charset="-120"/>
               </a:rPr>
-              <a:t>P4 : Exercice : concevoir un ADT avec encapsulation correcte</a:t>
-            </a:r>
-            <a:endParaRPr lang="en-US" sz="1500" dirty="0"/>
-          </a:p>
-          <a:p>
-            <a:pPr indent="0" marL="0">
-              <a:buNone/>
-            </a:pPr>
-            <a:endParaRPr lang="en-US" sz="1500" dirty="0"/>
-          </a:p>
-          <a:p>
-            <a:pPr indent="0" marL="0">
-              <a:buNone/>
-            </a:pPr>
-            <a:r>
-              <a:rPr lang="en-US" sz="1400" b="1" dirty="0">
-                <a:solidFill>
-                  <a:srgbClr val="F97316"/>
-                </a:solidFill>
-                <a:latin typeface="Calibri" pitchFamily="34" charset="0"/>
-                <a:ea typeface="Calibri" pitchFamily="34" charset="-122"/>
-                <a:cs typeface="Calibri" pitchFamily="34" charset="-120"/>
-              </a:rPr>
-              <a:t>Critère M3 — l'étudiant doit :</a:t>
-            </a:r>
-            <a:endParaRPr lang="en-US" sz="1500" dirty="0"/>
+              <a:t>Permet le POLYMORPHISME (List = ArrayList ou LinkedList)</a:t>
+            </a:r>
+            <a:endParaRPr lang="en-US" sz="1300" dirty="0"/>
           </a:p>
           <a:p>
             <a:pPr marL="342900" indent="-342900">
@@ -3364,7 +3372,7 @@
               <a:buChar char="•"/>
             </a:pPr>
             <a:r>
-              <a:rPr lang="en-US" sz="1200" dirty="0">
+              <a:rPr lang="en-US" sz="1300" dirty="0">
                 <a:solidFill>
                   <a:srgbClr val="E2E8F0"/>
                 </a:solidFill>
@@ -3372,17 +3380,336 @@
                 <a:ea typeface="Calibri" pitchFamily="34" charset="-122"/>
                 <a:cs typeface="Calibri" pitchFamily="34" charset="-120"/>
               </a:rPr>
-              <a:t>Expliquer encapsulation ET information hiding (ce sont deux concepts liés mais distincts)</a:t>
-            </a:r>
-            <a:endParaRPr lang="en-US" sz="1500" dirty="0"/>
-          </a:p>
+              <a:t>Différence avec classe abstraite : pas d'attributs, multi-héritage possible</a:t>
+            </a:r>
+            <a:endParaRPr lang="en-US" sz="1300" dirty="0"/>
+          </a:p>
+        </p:txBody>
+      </p:sp>
+      <p:sp>
+        <p:nvSpPr>
+          <p:cNvPr id="5" name="Shape 3"/>
+          <p:cNvSpPr/>
+          <p:nvPr/>
+        </p:nvSpPr>
+        <p:spPr>
+          <a:xfrm>
+            <a:off x="4754880" y="1005840"/>
+            <a:ext cx="4023360" cy="3200400"/>
+          </a:xfrm>
+          <a:prstGeom prst="roundRect">
+            <a:avLst>
+              <a:gd name="adj" fmla="val 2857"/>
+            </a:avLst>
+          </a:prstGeom>
+          <a:solidFill>
+            <a:srgbClr val="0D1117"/>
+          </a:solidFill>
+          <a:ln/>
+        </p:spPr>
+      </p:sp>
+      <p:sp>
+        <p:nvSpPr>
+          <p:cNvPr id="6" name="Text 4"/>
+          <p:cNvSpPr/>
+          <p:nvPr/>
+        </p:nvSpPr>
+        <p:spPr>
+          <a:xfrm>
+            <a:off x="4937760" y="1143000"/>
+            <a:ext cx="3657600" cy="2926080"/>
+          </a:xfrm>
+          <a:prstGeom prst="rect">
+            <a:avLst/>
+          </a:prstGeom>
+          <a:noFill/>
+          <a:ln/>
+        </p:spPr>
+        <p:txBody>
+          <a:bodyPr wrap="square" rtlCol="0" anchor="t"/>
+          <a:lstStyle/>
+          <a:p>
+            <a:pPr indent="0" marL="0">
+              <a:buNone/>
+            </a:pPr>
+            <a:r>
+              <a:rPr lang="en-US" sz="1000" dirty="0">
+                <a:solidFill>
+                  <a:srgbClr val="A5F3FC"/>
+                </a:solidFill>
+                <a:latin typeface="Consolas" pitchFamily="34" charset="0"/>
+                <a:ea typeface="Consolas" pitchFamily="34" charset="-122"/>
+                <a:cs typeface="Consolas" pitchFamily="34" charset="-120"/>
+              </a:rPr>
+              <a:t>interface Stockable {</a:t>
+            </a:r>
+            <a:endParaRPr lang="en-US" sz="1000" dirty="0"/>
+          </a:p>
+          <a:p>
+            <a:pPr indent="0" marL="0">
+              <a:buNone/>
+            </a:pPr>
+            <a:r>
+              <a:rPr lang="en-US" sz="1000" dirty="0">
+                <a:solidFill>
+                  <a:srgbClr val="A5F3FC"/>
+                </a:solidFill>
+                <a:latin typeface="Consolas" pitchFamily="34" charset="0"/>
+                <a:ea typeface="Consolas" pitchFamily="34" charset="-122"/>
+                <a:cs typeface="Consolas" pitchFamily="34" charset="-120"/>
+              </a:rPr>
+              <a:t>    void ajouter(String item);</a:t>
+            </a:r>
+            <a:endParaRPr lang="en-US" sz="1000" dirty="0"/>
+          </a:p>
+          <a:p>
+            <a:pPr indent="0" marL="0">
+              <a:buNone/>
+            </a:pPr>
+            <a:r>
+              <a:rPr lang="en-US" sz="1000" dirty="0">
+                <a:solidFill>
+                  <a:srgbClr val="A5F3FC"/>
+                </a:solidFill>
+                <a:latin typeface="Consolas" pitchFamily="34" charset="0"/>
+                <a:ea typeface="Consolas" pitchFamily="34" charset="-122"/>
+                <a:cs typeface="Consolas" pitchFamily="34" charset="-120"/>
+              </a:rPr>
+              <a:t>    String retirer();</a:t>
+            </a:r>
+            <a:endParaRPr lang="en-US" sz="1000" dirty="0"/>
+          </a:p>
+          <a:p>
+            <a:pPr indent="0" marL="0">
+              <a:buNone/>
+            </a:pPr>
+            <a:r>
+              <a:rPr lang="en-US" sz="1000" dirty="0">
+                <a:solidFill>
+                  <a:srgbClr val="A5F3FC"/>
+                </a:solidFill>
+                <a:latin typeface="Consolas" pitchFamily="34" charset="0"/>
+                <a:ea typeface="Consolas" pitchFamily="34" charset="-122"/>
+                <a:cs typeface="Consolas" pitchFamily="34" charset="-120"/>
+              </a:rPr>
+              <a:t>    boolean estVide();</a:t>
+            </a:r>
+            <a:endParaRPr lang="en-US" sz="1000" dirty="0"/>
+          </a:p>
+          <a:p>
+            <a:pPr indent="0" marL="0">
+              <a:buNone/>
+            </a:pPr>
+            <a:r>
+              <a:rPr lang="en-US" sz="1000" dirty="0">
+                <a:solidFill>
+                  <a:srgbClr val="A5F3FC"/>
+                </a:solidFill>
+                <a:latin typeface="Consolas" pitchFamily="34" charset="0"/>
+                <a:ea typeface="Consolas" pitchFamily="34" charset="-122"/>
+                <a:cs typeface="Consolas" pitchFamily="34" charset="-120"/>
+              </a:rPr>
+              <a:t>}</a:t>
+            </a:r>
+            <a:endParaRPr lang="en-US" sz="1000" dirty="0"/>
+          </a:p>
+          <a:p>
+            <a:pPr indent="0" marL="0">
+              <a:buNone/>
+            </a:pPr>
+            <a:endParaRPr lang="en-US" sz="1000" dirty="0"/>
+          </a:p>
+          <a:p>
+            <a:pPr indent="0" marL="0">
+              <a:buNone/>
+            </a:pPr>
+            <a:r>
+              <a:rPr lang="en-US" sz="1000" dirty="0">
+                <a:solidFill>
+                  <a:srgbClr val="A5F3FC"/>
+                </a:solidFill>
+                <a:latin typeface="Consolas" pitchFamily="34" charset="0"/>
+                <a:ea typeface="Consolas" pitchFamily="34" charset="-122"/>
+                <a:cs typeface="Consolas" pitchFamily="34" charset="-120"/>
+              </a:rPr>
+              <a:t>// Le client ne sait pas SI c'est</a:t>
+            </a:r>
+            <a:endParaRPr lang="en-US" sz="1000" dirty="0"/>
+          </a:p>
+          <a:p>
+            <a:pPr indent="0" marL="0">
+              <a:buNone/>
+            </a:pPr>
+            <a:r>
+              <a:rPr lang="en-US" sz="1000" dirty="0">
+                <a:solidFill>
+                  <a:srgbClr val="A5F3FC"/>
+                </a:solidFill>
+                <a:latin typeface="Consolas" pitchFamily="34" charset="0"/>
+                <a:ea typeface="Consolas" pitchFamily="34" charset="-122"/>
+                <a:cs typeface="Consolas" pitchFamily="34" charset="-120"/>
+              </a:rPr>
+              <a:t>// ArrayList ou LinkedList dedans !</a:t>
+            </a:r>
+            <a:endParaRPr lang="en-US" sz="1000" dirty="0"/>
+          </a:p>
+          <a:p>
+            <a:pPr indent="0" marL="0">
+              <a:buNone/>
+            </a:pPr>
+            <a:r>
+              <a:rPr lang="en-US" sz="1000" dirty="0">
+                <a:solidFill>
+                  <a:srgbClr val="A5F3FC"/>
+                </a:solidFill>
+                <a:latin typeface="Consolas" pitchFamily="34" charset="0"/>
+                <a:ea typeface="Consolas" pitchFamily="34" charset="-122"/>
+                <a:cs typeface="Consolas" pitchFamily="34" charset="-120"/>
+              </a:rPr>
+              <a:t>Stockable s = new Inventaire();</a:t>
+            </a:r>
+            <a:endParaRPr lang="en-US" sz="1000" dirty="0"/>
+          </a:p>
+          <a:p>
+            <a:pPr indent="0" marL="0">
+              <a:buNone/>
+            </a:pPr>
+            <a:r>
+              <a:rPr lang="en-US" sz="1000" dirty="0">
+                <a:solidFill>
+                  <a:srgbClr val="A5F3FC"/>
+                </a:solidFill>
+                <a:latin typeface="Consolas" pitchFamily="34" charset="0"/>
+                <a:ea typeface="Consolas" pitchFamily="34" charset="-122"/>
+                <a:cs typeface="Consolas" pitchFamily="34" charset="-120"/>
+              </a:rPr>
+              <a:t>s.ajouter("Clavier");</a:t>
+            </a:r>
+            <a:endParaRPr lang="en-US" sz="1000" dirty="0"/>
+          </a:p>
+        </p:txBody>
+      </p:sp>
+    </p:spTree>
+  </p:cSld>
+  <p:clrMapOvr>
+    <a:masterClrMapping/>
+  </p:clrMapOvr>
+</p:sld>
+</file>
+
+<file path=ppt/slides/slide7.xml><?xml version="1.0" encoding="utf-8"?>
+<p:sld xmlns:a="http://schemas.openxmlformats.org/drawingml/2006/main" xmlns:r="http://schemas.openxmlformats.org/officeDocument/2006/relationships" xmlns:p="http://schemas.openxmlformats.org/presentationml/2006/main">
+  <p:cSld name="Slide 7">
+    <p:bg>
+      <p:bgPr>
+        <a:solidFill>
+          <a:srgbClr val="0B2027"/>
+        </a:solidFill>
+      </p:bgPr>
+    </p:bg>
+    <p:spTree>
+      <p:nvGrpSpPr>
+        <p:cNvPr id="1" name=""/>
+        <p:cNvGrpSpPr/>
+        <p:nvPr/>
+      </p:nvGrpSpPr>
+      <p:grpSpPr>
+        <a:xfrm>
+          <a:off x="0" y="0"/>
+          <a:ext cx="0" cy="0"/>
+          <a:chOff x="0" y="0"/>
+          <a:chExt cx="0" cy="0"/>
+        </a:xfrm>
+      </p:grpSpPr>
+      <p:sp>
+        <p:nvSpPr>
+          <p:cNvPr id="2" name="Shape 0"/>
+          <p:cNvSpPr/>
+          <p:nvPr/>
+        </p:nvSpPr>
+        <p:spPr>
+          <a:xfrm>
+            <a:off x="0" y="0"/>
+            <a:ext cx="9144000" cy="54864"/>
+          </a:xfrm>
+          <a:prstGeom prst="rect">
+            <a:avLst/>
+          </a:prstGeom>
+          <a:solidFill>
+            <a:srgbClr val="0891B2"/>
+          </a:solidFill>
+          <a:ln/>
+        </p:spPr>
+      </p:sp>
+      <p:sp>
+        <p:nvSpPr>
+          <p:cNvPr id="3" name="Text 1"/>
+          <p:cNvSpPr/>
+          <p:nvPr/>
+        </p:nvSpPr>
+        <p:spPr>
+          <a:xfrm>
+            <a:off x="548640" y="274320"/>
+            <a:ext cx="8229600" cy="548640"/>
+          </a:xfrm>
+          <a:prstGeom prst="rect">
+            <a:avLst/>
+          </a:prstGeom>
+          <a:noFill/>
+          <a:ln/>
+        </p:spPr>
+        <p:txBody>
+          <a:bodyPr wrap="square" lIns="0" tIns="0" rIns="0" bIns="0" rtlCol="0" anchor="ctr"/>
+          <a:lstStyle/>
+          <a:p>
+            <a:pPr indent="0" marL="0">
+              <a:buNone/>
+            </a:pPr>
+            <a:r>
+              <a:rPr lang="en-US" sz="2400" b="1" dirty="0">
+                <a:solidFill>
+                  <a:srgbClr val="FFFFFF"/>
+                </a:solidFill>
+                <a:latin typeface="Calibri" pitchFamily="34" charset="0"/>
+                <a:ea typeface="Calibri" pitchFamily="34" charset="-122"/>
+                <a:cs typeface="Calibri" pitchFamily="34" charset="-120"/>
+              </a:rPr>
+              <a:t>Encapsulation + Héritage</a:t>
+            </a:r>
+            <a:endParaRPr lang="en-US" sz="2400" dirty="0"/>
+          </a:p>
+        </p:txBody>
+      </p:sp>
+      <p:sp>
+        <p:nvSpPr>
+          <p:cNvPr id="4" name="Text 2"/>
+          <p:cNvSpPr/>
+          <p:nvPr/>
+        </p:nvSpPr>
+        <p:spPr>
+          <a:xfrm>
+            <a:off x="548640" y="1005840"/>
+            <a:ext cx="8046720" cy="3657600"/>
+          </a:xfrm>
+          <a:prstGeom prst="rect">
+            <a:avLst/>
+          </a:prstGeom>
+          <a:noFill/>
+          <a:ln/>
+        </p:spPr>
+        <p:txBody>
+          <a:bodyPr wrap="square" rtlCol="0" anchor="t"/>
+          <a:lstStyle/>
           <a:p>
             <a:pPr marL="342900" indent="-342900">
+              <a:lnSpc>
+                <a:spcPct val="130000"/>
+              </a:lnSpc>
               <a:buSzPct val="100000"/>
               <a:buChar char="•"/>
             </a:pPr>
             <a:r>
-              <a:rPr lang="en-US" sz="1200" dirty="0">
+              <a:rPr lang="en-US" sz="1400" dirty="0">
                 <a:solidFill>
                   <a:srgbClr val="E2E8F0"/>
                 </a:solidFill>
@@ -3390,17 +3717,20 @@
                 <a:ea typeface="Calibri" pitchFamily="34" charset="-122"/>
                 <a:cs typeface="Calibri" pitchFamily="34" charset="-120"/>
               </a:rPr>
-              <a:t>Montrer un exemple concret où le changement d'implémentation est transparent</a:t>
-            </a:r>
-            <a:endParaRPr lang="en-US" sz="1500" dirty="0"/>
+              <a:t>Une sous-classe hérite des méthodes publiques</a:t>
+            </a:r>
+            <a:endParaRPr lang="en-US" sz="1400" dirty="0"/>
           </a:p>
           <a:p>
             <a:pPr marL="342900" indent="-342900">
+              <a:lnSpc>
+                <a:spcPct val="130000"/>
+              </a:lnSpc>
               <a:buSzPct val="100000"/>
               <a:buChar char="•"/>
             </a:pPr>
             <a:r>
-              <a:rPr lang="en-US" sz="1200" dirty="0">
+              <a:rPr lang="en-US" sz="1400" dirty="0">
                 <a:solidFill>
                   <a:srgbClr val="E2E8F0"/>
                 </a:solidFill>
@@ -3408,17 +3738,20 @@
                 <a:ea typeface="Calibri" pitchFamily="34" charset="-122"/>
                 <a:cs typeface="Calibri" pitchFamily="34" charset="-120"/>
               </a:rPr>
-              <a:t>Identifier les avantages : modularité, maintenabilité, sécurité, réutilisabilité</a:t>
-            </a:r>
-            <a:endParaRPr lang="en-US" sz="1500" dirty="0"/>
+              <a:t>Mais PAS d'accès direct aux attributs private du parent</a:t>
+            </a:r>
+            <a:endParaRPr lang="en-US" sz="1400" dirty="0"/>
           </a:p>
           <a:p>
             <a:pPr marL="342900" indent="-342900">
+              <a:lnSpc>
+                <a:spcPct val="130000"/>
+              </a:lnSpc>
               <a:buSzPct val="100000"/>
               <a:buChar char="•"/>
             </a:pPr>
             <a:r>
-              <a:rPr lang="en-US" sz="1200" dirty="0">
+              <a:rPr lang="en-US" sz="1400" dirty="0">
                 <a:solidFill>
                   <a:srgbClr val="E2E8F0"/>
                 </a:solidFill>
@@ -3426,9 +3759,884 @@
                 <a:ea typeface="Calibri" pitchFamily="34" charset="-122"/>
                 <a:cs typeface="Calibri" pitchFamily="34" charset="-120"/>
               </a:rPr>
-              <a:t>Lier à un exemple de code Java avec private/public</a:t>
-            </a:r>
-            <a:endParaRPr lang="en-US" sz="1500" dirty="0"/>
+              <a:t>Utiliser protected pour permettre l'accès aux sous-classes</a:t>
+            </a:r>
+            <a:endParaRPr lang="en-US" sz="1400" dirty="0"/>
+          </a:p>
+          <a:p>
+            <a:pPr marL="342900" indent="-342900">
+              <a:lnSpc>
+                <a:spcPct val="130000"/>
+              </a:lnSpc>
+              <a:buSzPct val="100000"/>
+              <a:buChar char="•"/>
+            </a:pPr>
+            <a:r>
+              <a:rPr lang="en-US" sz="1400" dirty="0">
+                <a:solidFill>
+                  <a:srgbClr val="E2E8F0"/>
+                </a:solidFill>
+                <a:latin typeface="Calibri" pitchFamily="34" charset="0"/>
+                <a:ea typeface="Calibri" pitchFamily="34" charset="-122"/>
+                <a:cs typeface="Calibri" pitchFamily="34" charset="-120"/>
+              </a:rPr>
+              <a:t>Le constructeur du parent est appelé avec super()</a:t>
+            </a:r>
+            <a:endParaRPr lang="en-US" sz="1400" dirty="0"/>
+          </a:p>
+          <a:p>
+            <a:pPr marL="342900" indent="-342900">
+              <a:lnSpc>
+                <a:spcPct val="130000"/>
+              </a:lnSpc>
+              <a:buSzPct val="100000"/>
+              <a:buChar char="•"/>
+            </a:pPr>
+            <a:r>
+              <a:rPr lang="en-US" sz="1400" dirty="0">
+                <a:solidFill>
+                  <a:srgbClr val="E2E8F0"/>
+                </a:solidFill>
+                <a:latin typeface="Calibri" pitchFamily="34" charset="0"/>
+                <a:ea typeface="Calibri" pitchFamily="34" charset="-122"/>
+                <a:cs typeface="Calibri" pitchFamily="34" charset="-120"/>
+              </a:rPr>
+              <a:t>Encapsulation préservée même dans l'héritage</a:t>
+            </a:r>
+            <a:endParaRPr lang="en-US" sz="1400" dirty="0"/>
+          </a:p>
+        </p:txBody>
+      </p:sp>
+    </p:spTree>
+  </p:cSld>
+  <p:clrMapOvr>
+    <a:masterClrMapping/>
+  </p:clrMapOvr>
+</p:sld>
+</file>
+
+<file path=ppt/slides/slide8.xml><?xml version="1.0" encoding="utf-8"?>
+<p:sld xmlns:a="http://schemas.openxmlformats.org/drawingml/2006/main" xmlns:r="http://schemas.openxmlformats.org/officeDocument/2006/relationships" xmlns:p="http://schemas.openxmlformats.org/presentationml/2006/main">
+  <p:cSld name="Slide 8">
+    <p:bg>
+      <p:bgPr>
+        <a:solidFill>
+          <a:srgbClr val="0B2027"/>
+        </a:solidFill>
+      </p:bgPr>
+    </p:bg>
+    <p:spTree>
+      <p:nvGrpSpPr>
+        <p:cNvPr id="1" name=""/>
+        <p:cNvGrpSpPr/>
+        <p:nvPr/>
+      </p:nvGrpSpPr>
+      <p:grpSpPr>
+        <a:xfrm>
+          <a:off x="0" y="0"/>
+          <a:ext cx="0" cy="0"/>
+          <a:chOff x="0" y="0"/>
+          <a:chExt cx="0" cy="0"/>
+        </a:xfrm>
+      </p:grpSpPr>
+      <p:sp>
+        <p:nvSpPr>
+          <p:cNvPr id="2" name="Shape 0"/>
+          <p:cNvSpPr/>
+          <p:nvPr/>
+        </p:nvSpPr>
+        <p:spPr>
+          <a:xfrm>
+            <a:off x="0" y="0"/>
+            <a:ext cx="9144000" cy="54864"/>
+          </a:xfrm>
+          <a:prstGeom prst="rect">
+            <a:avLst/>
+          </a:prstGeom>
+          <a:solidFill>
+            <a:srgbClr val="0891B2"/>
+          </a:solidFill>
+          <a:ln/>
+        </p:spPr>
+      </p:sp>
+      <p:sp>
+        <p:nvSpPr>
+          <p:cNvPr id="3" name="Text 1"/>
+          <p:cNvSpPr/>
+          <p:nvPr/>
+        </p:nvSpPr>
+        <p:spPr>
+          <a:xfrm>
+            <a:off x="548640" y="274320"/>
+            <a:ext cx="8229600" cy="548640"/>
+          </a:xfrm>
+          <a:prstGeom prst="rect">
+            <a:avLst/>
+          </a:prstGeom>
+          <a:noFill/>
+          <a:ln/>
+        </p:spPr>
+        <p:txBody>
+          <a:bodyPr wrap="square" lIns="0" tIns="0" rIns="0" bIns="0" rtlCol="0" anchor="ctr"/>
+          <a:lstStyle/>
+          <a:p>
+            <a:pPr indent="0" marL="0">
+              <a:buNone/>
+            </a:pPr>
+            <a:r>
+              <a:rPr lang="en-US" sz="2400" b="1" dirty="0">
+                <a:solidFill>
+                  <a:srgbClr val="FFFFFF"/>
+                </a:solidFill>
+                <a:latin typeface="Calibri" pitchFamily="34" charset="0"/>
+                <a:ea typeface="Calibri" pitchFamily="34" charset="-122"/>
+                <a:cs typeface="Calibri" pitchFamily="34" charset="-120"/>
+              </a:rPr>
+              <a:t>Encapsulation + Modularité</a:t>
+            </a:r>
+            <a:endParaRPr lang="en-US" sz="2400" dirty="0"/>
+          </a:p>
+        </p:txBody>
+      </p:sp>
+      <p:sp>
+        <p:nvSpPr>
+          <p:cNvPr id="4" name="Text 2"/>
+          <p:cNvSpPr/>
+          <p:nvPr/>
+        </p:nvSpPr>
+        <p:spPr>
+          <a:xfrm>
+            <a:off x="548640" y="1005840"/>
+            <a:ext cx="8046720" cy="3657600"/>
+          </a:xfrm>
+          <a:prstGeom prst="rect">
+            <a:avLst/>
+          </a:prstGeom>
+          <a:noFill/>
+          <a:ln/>
+        </p:spPr>
+        <p:txBody>
+          <a:bodyPr wrap="square" rtlCol="0" anchor="t"/>
+          <a:lstStyle/>
+          <a:p>
+            <a:pPr marL="342900" indent="-342900">
+              <a:lnSpc>
+                <a:spcPct val="130000"/>
+              </a:lnSpc>
+              <a:buSzPct val="100000"/>
+              <a:buChar char="•"/>
+            </a:pPr>
+            <a:r>
+              <a:rPr lang="en-US" sz="1400" dirty="0">
+                <a:solidFill>
+                  <a:srgbClr val="E2E8F0"/>
+                </a:solidFill>
+                <a:latin typeface="Calibri" pitchFamily="34" charset="0"/>
+                <a:ea typeface="Calibri" pitchFamily="34" charset="-122"/>
+                <a:cs typeface="Calibri" pitchFamily="34" charset="-120"/>
+              </a:rPr>
+              <a:t>Chaque module (classe) a une responsabilité unique</a:t>
+            </a:r>
+            <a:endParaRPr lang="en-US" sz="1400" dirty="0"/>
+          </a:p>
+          <a:p>
+            <a:pPr marL="342900" indent="-342900">
+              <a:lnSpc>
+                <a:spcPct val="130000"/>
+              </a:lnSpc>
+              <a:buSzPct val="100000"/>
+              <a:buChar char="•"/>
+            </a:pPr>
+            <a:r>
+              <a:rPr lang="en-US" sz="1400" dirty="0">
+                <a:solidFill>
+                  <a:srgbClr val="E2E8F0"/>
+                </a:solidFill>
+                <a:latin typeface="Calibri" pitchFamily="34" charset="0"/>
+                <a:ea typeface="Calibri" pitchFamily="34" charset="-122"/>
+                <a:cs typeface="Calibri" pitchFamily="34" charset="-120"/>
+              </a:rPr>
+              <a:t>L'encapsulation garantit l'indépendance des modules</a:t>
+            </a:r>
+            <a:endParaRPr lang="en-US" sz="1400" dirty="0"/>
+          </a:p>
+          <a:p>
+            <a:pPr marL="342900" indent="-342900">
+              <a:lnSpc>
+                <a:spcPct val="130000"/>
+              </a:lnSpc>
+              <a:buSzPct val="100000"/>
+              <a:buChar char="•"/>
+            </a:pPr>
+            <a:r>
+              <a:rPr lang="en-US" sz="1400" dirty="0">
+                <a:solidFill>
+                  <a:srgbClr val="E2E8F0"/>
+                </a:solidFill>
+                <a:latin typeface="Calibri" pitchFamily="34" charset="0"/>
+                <a:ea typeface="Calibri" pitchFamily="34" charset="-122"/>
+                <a:cs typeface="Calibri" pitchFamily="34" charset="-120"/>
+              </a:rPr>
+              <a:t>Changer l'implémentation interne = TRANSPARENT pour les autres</a:t>
+            </a:r>
+            <a:endParaRPr lang="en-US" sz="1400" dirty="0"/>
+          </a:p>
+          <a:p>
+            <a:pPr marL="342900" indent="-342900">
+              <a:lnSpc>
+                <a:spcPct val="130000"/>
+              </a:lnSpc>
+              <a:buSzPct val="100000"/>
+              <a:buChar char="•"/>
+            </a:pPr>
+            <a:r>
+              <a:rPr lang="en-US" sz="1400" dirty="0">
+                <a:solidFill>
+                  <a:srgbClr val="E2E8F0"/>
+                </a:solidFill>
+                <a:latin typeface="Calibri" pitchFamily="34" charset="0"/>
+                <a:ea typeface="Calibri" pitchFamily="34" charset="-122"/>
+                <a:cs typeface="Calibri" pitchFamily="34" charset="-120"/>
+              </a:rPr>
+              <a:t>Exemple : remplacer ArrayList par LinkedList sans casser le code client</a:t>
+            </a:r>
+            <a:endParaRPr lang="en-US" sz="1400" dirty="0"/>
+          </a:p>
+          <a:p>
+            <a:pPr marL="342900" indent="-342900">
+              <a:lnSpc>
+                <a:spcPct val="130000"/>
+              </a:lnSpc>
+              <a:buSzPct val="100000"/>
+              <a:buChar char="•"/>
+            </a:pPr>
+            <a:r>
+              <a:rPr lang="en-US" sz="1400" dirty="0">
+                <a:solidFill>
+                  <a:srgbClr val="E2E8F0"/>
+                </a:solidFill>
+                <a:latin typeface="Calibri" pitchFamily="34" charset="0"/>
+                <a:ea typeface="Calibri" pitchFamily="34" charset="-122"/>
+                <a:cs typeface="Calibri" pitchFamily="34" charset="-120"/>
+              </a:rPr>
+              <a:t>Couplage faible = bon design</a:t>
+            </a:r>
+            <a:endParaRPr lang="en-US" sz="1400" dirty="0"/>
+          </a:p>
+        </p:txBody>
+      </p:sp>
+    </p:spTree>
+  </p:cSld>
+  <p:clrMapOvr>
+    <a:masterClrMapping/>
+  </p:clrMapOvr>
+</p:sld>
+</file>
+
+<file path=ppt/slides/slide9.xml><?xml version="1.0" encoding="utf-8"?>
+<p:sld xmlns:a="http://schemas.openxmlformats.org/drawingml/2006/main" xmlns:r="http://schemas.openxmlformats.org/officeDocument/2006/relationships" xmlns:p="http://schemas.openxmlformats.org/presentationml/2006/main">
+  <p:cSld name="Slide 9">
+    <p:bg>
+      <p:bgPr>
+        <a:solidFill>
+          <a:srgbClr val="0B2027"/>
+        </a:solidFill>
+      </p:bgPr>
+    </p:bg>
+    <p:spTree>
+      <p:nvGrpSpPr>
+        <p:cNvPr id="1" name=""/>
+        <p:cNvGrpSpPr/>
+        <p:nvPr/>
+      </p:nvGrpSpPr>
+      <p:grpSpPr>
+        <a:xfrm>
+          <a:off x="0" y="0"/>
+          <a:ext cx="0" cy="0"/>
+          <a:chOff x="0" y="0"/>
+          <a:chExt cx="0" cy="0"/>
+        </a:xfrm>
+      </p:grpSpPr>
+      <p:sp>
+        <p:nvSpPr>
+          <p:cNvPr id="2" name="Text 0"/>
+          <p:cNvSpPr/>
+          <p:nvPr/>
+        </p:nvSpPr>
+        <p:spPr>
+          <a:xfrm>
+            <a:off x="548640" y="274320"/>
+            <a:ext cx="8229600" cy="548640"/>
+          </a:xfrm>
+          <a:prstGeom prst="rect">
+            <a:avLst/>
+          </a:prstGeom>
+          <a:noFill/>
+          <a:ln/>
+        </p:spPr>
+        <p:txBody>
+          <a:bodyPr wrap="square" rtlCol="0" anchor="ctr"/>
+          <a:lstStyle/>
+          <a:p>
+            <a:pPr indent="0" marL="0">
+              <a:buNone/>
+            </a:pPr>
+            <a:r>
+              <a:rPr lang="en-US" sz="2800" b="1" dirty="0">
+                <a:solidFill>
+                  <a:srgbClr val="FFFFFF"/>
+                </a:solidFill>
+                <a:latin typeface="Calibri" pitchFamily="34" charset="0"/>
+                <a:ea typeface="Calibri" pitchFamily="34" charset="-122"/>
+                <a:cs typeface="Calibri" pitchFamily="34" charset="-120"/>
+              </a:rPr>
+              <a:t>Récapitulatif — Encapsulation</a:t>
+            </a:r>
+            <a:endParaRPr lang="en-US" sz="2800" dirty="0"/>
+          </a:p>
+        </p:txBody>
+      </p:sp>
+      <p:sp>
+        <p:nvSpPr>
+          <p:cNvPr id="3" name="Shape 1"/>
+          <p:cNvSpPr/>
+          <p:nvPr/>
+        </p:nvSpPr>
+        <p:spPr>
+          <a:xfrm>
+            <a:off x="548640" y="1097280"/>
+            <a:ext cx="1920240" cy="3200400"/>
+          </a:xfrm>
+          <a:prstGeom prst="roundRect">
+            <a:avLst>
+              <a:gd name="adj" fmla="val 4762"/>
+            </a:avLst>
+          </a:prstGeom>
+          <a:solidFill>
+            <a:srgbClr val="133740"/>
+          </a:solidFill>
+          <a:ln/>
+        </p:spPr>
+      </p:sp>
+      <p:sp>
+        <p:nvSpPr>
+          <p:cNvPr id="4" name="Text 2"/>
+          <p:cNvSpPr/>
+          <p:nvPr/>
+        </p:nvSpPr>
+        <p:spPr>
+          <a:xfrm>
+            <a:off x="548640" y="1280160"/>
+            <a:ext cx="1920240" cy="457200"/>
+          </a:xfrm>
+          <a:prstGeom prst="rect">
+            <a:avLst/>
+          </a:prstGeom>
+          <a:noFill/>
+          <a:ln/>
+        </p:spPr>
+        <p:txBody>
+          <a:bodyPr wrap="square" rtlCol="0" anchor="ctr"/>
+          <a:lstStyle/>
+          <a:p>
+            <a:pPr algn="ctr" indent="0" marL="0">
+              <a:buNone/>
+            </a:pPr>
+            <a:r>
+              <a:rPr lang="en-US" sz="2800" dirty="0">
+                <a:solidFill>
+                  <a:srgbClr val="000000"/>
+                </a:solidFill>
+              </a:rPr>
+              <a:t>🔒</a:t>
+            </a:r>
+            <a:endParaRPr lang="en-US" sz="2800" dirty="0"/>
+          </a:p>
+        </p:txBody>
+      </p:sp>
+      <p:sp>
+        <p:nvSpPr>
+          <p:cNvPr id="5" name="Text 3"/>
+          <p:cNvSpPr/>
+          <p:nvPr/>
+        </p:nvSpPr>
+        <p:spPr>
+          <a:xfrm>
+            <a:off x="685800" y="1828800"/>
+            <a:ext cx="1645920" cy="365760"/>
+          </a:xfrm>
+          <a:prstGeom prst="rect">
+            <a:avLst/>
+          </a:prstGeom>
+          <a:noFill/>
+          <a:ln/>
+        </p:spPr>
+        <p:txBody>
+          <a:bodyPr wrap="square" rtlCol="0" anchor="ctr"/>
+          <a:lstStyle/>
+          <a:p>
+            <a:pPr algn="ctr" indent="0" marL="0">
+              <a:buNone/>
+            </a:pPr>
+            <a:r>
+              <a:rPr lang="en-US" sz="1300" b="1" dirty="0">
+                <a:solidFill>
+                  <a:srgbClr val="0891B2"/>
+                </a:solidFill>
+                <a:latin typeface="Calibri" pitchFamily="34" charset="0"/>
+                <a:ea typeface="Calibri" pitchFamily="34" charset="-122"/>
+                <a:cs typeface="Calibri" pitchFamily="34" charset="-120"/>
+              </a:rPr>
+              <a:t>Encapsulation</a:t>
+            </a:r>
+            <a:endParaRPr lang="en-US" sz="1300" dirty="0"/>
+          </a:p>
+        </p:txBody>
+      </p:sp>
+      <p:sp>
+        <p:nvSpPr>
+          <p:cNvPr id="6" name="Text 4"/>
+          <p:cNvSpPr/>
+          <p:nvPr/>
+        </p:nvSpPr>
+        <p:spPr>
+          <a:xfrm>
+            <a:off x="685800" y="2286000"/>
+            <a:ext cx="1645920" cy="1828800"/>
+          </a:xfrm>
+          <a:prstGeom prst="rect">
+            <a:avLst/>
+          </a:prstGeom>
+          <a:noFill/>
+          <a:ln/>
+        </p:spPr>
+        <p:txBody>
+          <a:bodyPr wrap="square" rtlCol="0" anchor="t"/>
+          <a:lstStyle/>
+          <a:p>
+            <a:pPr algn="ctr" indent="0" marL="0">
+              <a:buNone/>
+            </a:pPr>
+            <a:r>
+              <a:rPr lang="en-US" sz="1100" dirty="0">
+                <a:solidFill>
+                  <a:srgbClr val="94A3B8"/>
+                </a:solidFill>
+                <a:latin typeface="Calibri" pitchFamily="34" charset="0"/>
+                <a:ea typeface="Calibri" pitchFamily="34" charset="-122"/>
+                <a:cs typeface="Calibri" pitchFamily="34" charset="-120"/>
+              </a:rPr>
+              <a:t>Regrouper données + méthodes, contrôler l'accès</a:t>
+            </a:r>
+            <a:endParaRPr lang="en-US" sz="1100" dirty="0"/>
+          </a:p>
+        </p:txBody>
+      </p:sp>
+      <p:sp>
+        <p:nvSpPr>
+          <p:cNvPr id="7" name="Shape 5"/>
+          <p:cNvSpPr/>
+          <p:nvPr/>
+        </p:nvSpPr>
+        <p:spPr>
+          <a:xfrm>
+            <a:off x="2651760" y="1097280"/>
+            <a:ext cx="1920240" cy="3200400"/>
+          </a:xfrm>
+          <a:prstGeom prst="roundRect">
+            <a:avLst>
+              <a:gd name="adj" fmla="val 4762"/>
+            </a:avLst>
+          </a:prstGeom>
+          <a:solidFill>
+            <a:srgbClr val="133740"/>
+          </a:solidFill>
+          <a:ln/>
+        </p:spPr>
+      </p:sp>
+      <p:sp>
+        <p:nvSpPr>
+          <p:cNvPr id="8" name="Text 6"/>
+          <p:cNvSpPr/>
+          <p:nvPr/>
+        </p:nvSpPr>
+        <p:spPr>
+          <a:xfrm>
+            <a:off x="2651760" y="1280160"/>
+            <a:ext cx="1920240" cy="457200"/>
+          </a:xfrm>
+          <a:prstGeom prst="rect">
+            <a:avLst/>
+          </a:prstGeom>
+          <a:noFill/>
+          <a:ln/>
+        </p:spPr>
+        <p:txBody>
+          <a:bodyPr wrap="square" rtlCol="0" anchor="ctr"/>
+          <a:lstStyle/>
+          <a:p>
+            <a:pPr algn="ctr" indent="0" marL="0">
+              <a:buNone/>
+            </a:pPr>
+            <a:r>
+              <a:rPr lang="en-US" sz="2800" dirty="0">
+                <a:solidFill>
+                  <a:srgbClr val="000000"/>
+                </a:solidFill>
+              </a:rPr>
+              <a:t>🕵️</a:t>
+            </a:r>
+            <a:endParaRPr lang="en-US" sz="2800" dirty="0"/>
+          </a:p>
+        </p:txBody>
+      </p:sp>
+      <p:sp>
+        <p:nvSpPr>
+          <p:cNvPr id="9" name="Text 7"/>
+          <p:cNvSpPr/>
+          <p:nvPr/>
+        </p:nvSpPr>
+        <p:spPr>
+          <a:xfrm>
+            <a:off x="2788920" y="1828800"/>
+            <a:ext cx="1645920" cy="365760"/>
+          </a:xfrm>
+          <a:prstGeom prst="rect">
+            <a:avLst/>
+          </a:prstGeom>
+          <a:noFill/>
+          <a:ln/>
+        </p:spPr>
+        <p:txBody>
+          <a:bodyPr wrap="square" rtlCol="0" anchor="ctr"/>
+          <a:lstStyle/>
+          <a:p>
+            <a:pPr algn="ctr" indent="0" marL="0">
+              <a:buNone/>
+            </a:pPr>
+            <a:r>
+              <a:rPr lang="en-US" sz="1300" b="1" dirty="0">
+                <a:solidFill>
+                  <a:srgbClr val="0891B2"/>
+                </a:solidFill>
+                <a:latin typeface="Calibri" pitchFamily="34" charset="0"/>
+                <a:ea typeface="Calibri" pitchFamily="34" charset="-122"/>
+                <a:cs typeface="Calibri" pitchFamily="34" charset="-120"/>
+              </a:rPr>
+              <a:t>Info Hiding</a:t>
+            </a:r>
+            <a:endParaRPr lang="en-US" sz="1300" dirty="0"/>
+          </a:p>
+        </p:txBody>
+      </p:sp>
+      <p:sp>
+        <p:nvSpPr>
+          <p:cNvPr id="10" name="Text 8"/>
+          <p:cNvSpPr/>
+          <p:nvPr/>
+        </p:nvSpPr>
+        <p:spPr>
+          <a:xfrm>
+            <a:off x="2788920" y="2286000"/>
+            <a:ext cx="1645920" cy="1828800"/>
+          </a:xfrm>
+          <a:prstGeom prst="rect">
+            <a:avLst/>
+          </a:prstGeom>
+          <a:noFill/>
+          <a:ln/>
+        </p:spPr>
+        <p:txBody>
+          <a:bodyPr wrap="square" rtlCol="0" anchor="t"/>
+          <a:lstStyle/>
+          <a:p>
+            <a:pPr algn="ctr" indent="0" marL="0">
+              <a:buNone/>
+            </a:pPr>
+            <a:r>
+              <a:rPr lang="en-US" sz="1100" dirty="0">
+                <a:solidFill>
+                  <a:srgbClr val="94A3B8"/>
+                </a:solidFill>
+                <a:latin typeface="Calibri" pitchFamily="34" charset="0"/>
+                <a:ea typeface="Calibri" pitchFamily="34" charset="-122"/>
+                <a:cs typeface="Calibri" pitchFamily="34" charset="-120"/>
+              </a:rPr>
+              <a:t>Cacher l'implémentation, exposer l'interface</a:t>
+            </a:r>
+            <a:endParaRPr lang="en-US" sz="1100" dirty="0"/>
+          </a:p>
+        </p:txBody>
+      </p:sp>
+      <p:sp>
+        <p:nvSpPr>
+          <p:cNvPr id="11" name="Shape 9"/>
+          <p:cNvSpPr/>
+          <p:nvPr/>
+        </p:nvSpPr>
+        <p:spPr>
+          <a:xfrm>
+            <a:off x="4754880" y="1097280"/>
+            <a:ext cx="1920240" cy="3200400"/>
+          </a:xfrm>
+          <a:prstGeom prst="roundRect">
+            <a:avLst>
+              <a:gd name="adj" fmla="val 4762"/>
+            </a:avLst>
+          </a:prstGeom>
+          <a:solidFill>
+            <a:srgbClr val="133740"/>
+          </a:solidFill>
+          <a:ln/>
+        </p:spPr>
+      </p:sp>
+      <p:sp>
+        <p:nvSpPr>
+          <p:cNvPr id="12" name="Text 10"/>
+          <p:cNvSpPr/>
+          <p:nvPr/>
+        </p:nvSpPr>
+        <p:spPr>
+          <a:xfrm>
+            <a:off x="4754880" y="1280160"/>
+            <a:ext cx="1920240" cy="457200"/>
+          </a:xfrm>
+          <a:prstGeom prst="rect">
+            <a:avLst/>
+          </a:prstGeom>
+          <a:noFill/>
+          <a:ln/>
+        </p:spPr>
+        <p:txBody>
+          <a:bodyPr wrap="square" rtlCol="0" anchor="ctr"/>
+          <a:lstStyle/>
+          <a:p>
+            <a:pPr algn="ctr" indent="0" marL="0">
+              <a:buNone/>
+            </a:pPr>
+            <a:r>
+              <a:rPr lang="en-US" sz="2800" dirty="0">
+                <a:solidFill>
+                  <a:srgbClr val="000000"/>
+                </a:solidFill>
+              </a:rPr>
+              <a:t>📋</a:t>
+            </a:r>
+            <a:endParaRPr lang="en-US" sz="2800" dirty="0"/>
+          </a:p>
+        </p:txBody>
+      </p:sp>
+      <p:sp>
+        <p:nvSpPr>
+          <p:cNvPr id="13" name="Text 11"/>
+          <p:cNvSpPr/>
+          <p:nvPr/>
+        </p:nvSpPr>
+        <p:spPr>
+          <a:xfrm>
+            <a:off x="4892040" y="1828800"/>
+            <a:ext cx="1645920" cy="365760"/>
+          </a:xfrm>
+          <a:prstGeom prst="rect">
+            <a:avLst/>
+          </a:prstGeom>
+          <a:noFill/>
+          <a:ln/>
+        </p:spPr>
+        <p:txBody>
+          <a:bodyPr wrap="square" rtlCol="0" anchor="ctr"/>
+          <a:lstStyle/>
+          <a:p>
+            <a:pPr algn="ctr" indent="0" marL="0">
+              <a:buNone/>
+            </a:pPr>
+            <a:r>
+              <a:rPr lang="en-US" sz="1300" b="1" dirty="0">
+                <a:solidFill>
+                  <a:srgbClr val="0891B2"/>
+                </a:solidFill>
+                <a:latin typeface="Calibri" pitchFamily="34" charset="0"/>
+                <a:ea typeface="Calibri" pitchFamily="34" charset="-122"/>
+                <a:cs typeface="Calibri" pitchFamily="34" charset="-120"/>
+              </a:rPr>
+              <a:t>Interfaces</a:t>
+            </a:r>
+            <a:endParaRPr lang="en-US" sz="1300" dirty="0"/>
+          </a:p>
+        </p:txBody>
+      </p:sp>
+      <p:sp>
+        <p:nvSpPr>
+          <p:cNvPr id="14" name="Text 12"/>
+          <p:cNvSpPr/>
+          <p:nvPr/>
+        </p:nvSpPr>
+        <p:spPr>
+          <a:xfrm>
+            <a:off x="4892040" y="2286000"/>
+            <a:ext cx="1645920" cy="1828800"/>
+          </a:xfrm>
+          <a:prstGeom prst="rect">
+            <a:avLst/>
+          </a:prstGeom>
+          <a:noFill/>
+          <a:ln/>
+        </p:spPr>
+        <p:txBody>
+          <a:bodyPr wrap="square" rtlCol="0" anchor="t"/>
+          <a:lstStyle/>
+          <a:p>
+            <a:pPr algn="ctr" indent="0" marL="0">
+              <a:buNone/>
+            </a:pPr>
+            <a:r>
+              <a:rPr lang="en-US" sz="1100" dirty="0">
+                <a:solidFill>
+                  <a:srgbClr val="94A3B8"/>
+                </a:solidFill>
+                <a:latin typeface="Calibri" pitchFamily="34" charset="0"/>
+                <a:ea typeface="Calibri" pitchFamily="34" charset="-122"/>
+                <a:cs typeface="Calibri" pitchFamily="34" charset="-120"/>
+              </a:rPr>
+              <a:t>Contrat ADT en Java, polymorphisme</a:t>
+            </a:r>
+            <a:endParaRPr lang="en-US" sz="1100" dirty="0"/>
+          </a:p>
+        </p:txBody>
+      </p:sp>
+      <p:sp>
+        <p:nvSpPr>
+          <p:cNvPr id="15" name="Shape 13"/>
+          <p:cNvSpPr/>
+          <p:nvPr/>
+        </p:nvSpPr>
+        <p:spPr>
+          <a:xfrm>
+            <a:off x="6858000" y="1097280"/>
+            <a:ext cx="1920240" cy="3200400"/>
+          </a:xfrm>
+          <a:prstGeom prst="roundRect">
+            <a:avLst>
+              <a:gd name="adj" fmla="val 4762"/>
+            </a:avLst>
+          </a:prstGeom>
+          <a:solidFill>
+            <a:srgbClr val="133740"/>
+          </a:solidFill>
+          <a:ln/>
+        </p:spPr>
+      </p:sp>
+      <p:sp>
+        <p:nvSpPr>
+          <p:cNvPr id="16" name="Text 14"/>
+          <p:cNvSpPr/>
+          <p:nvPr/>
+        </p:nvSpPr>
+        <p:spPr>
+          <a:xfrm>
+            <a:off x="6858000" y="1280160"/>
+            <a:ext cx="1920240" cy="457200"/>
+          </a:xfrm>
+          <a:prstGeom prst="rect">
+            <a:avLst/>
+          </a:prstGeom>
+          <a:noFill/>
+          <a:ln/>
+        </p:spPr>
+        <p:txBody>
+          <a:bodyPr wrap="square" rtlCol="0" anchor="ctr"/>
+          <a:lstStyle/>
+          <a:p>
+            <a:pPr algn="ctr" indent="0" marL="0">
+              <a:buNone/>
+            </a:pPr>
+            <a:r>
+              <a:rPr lang="en-US" sz="2800" dirty="0">
+                <a:solidFill>
+                  <a:srgbClr val="000000"/>
+                </a:solidFill>
+              </a:rPr>
+              <a:t>🧬</a:t>
+            </a:r>
+            <a:endParaRPr lang="en-US" sz="2800" dirty="0"/>
+          </a:p>
+        </p:txBody>
+      </p:sp>
+      <p:sp>
+        <p:nvSpPr>
+          <p:cNvPr id="17" name="Text 15"/>
+          <p:cNvSpPr/>
+          <p:nvPr/>
+        </p:nvSpPr>
+        <p:spPr>
+          <a:xfrm>
+            <a:off x="6995160" y="1828800"/>
+            <a:ext cx="1645920" cy="365760"/>
+          </a:xfrm>
+          <a:prstGeom prst="rect">
+            <a:avLst/>
+          </a:prstGeom>
+          <a:noFill/>
+          <a:ln/>
+        </p:spPr>
+        <p:txBody>
+          <a:bodyPr wrap="square" rtlCol="0" anchor="ctr"/>
+          <a:lstStyle/>
+          <a:p>
+            <a:pPr algn="ctr" indent="0" marL="0">
+              <a:buNone/>
+            </a:pPr>
+            <a:r>
+              <a:rPr lang="en-US" sz="1300" b="1" dirty="0">
+                <a:solidFill>
+                  <a:srgbClr val="0891B2"/>
+                </a:solidFill>
+                <a:latin typeface="Calibri" pitchFamily="34" charset="0"/>
+                <a:ea typeface="Calibri" pitchFamily="34" charset="-122"/>
+                <a:cs typeface="Calibri" pitchFamily="34" charset="-120"/>
+              </a:rPr>
+              <a:t>Héritage</a:t>
+            </a:r>
+            <a:endParaRPr lang="en-US" sz="1300" dirty="0"/>
+          </a:p>
+        </p:txBody>
+      </p:sp>
+      <p:sp>
+        <p:nvSpPr>
+          <p:cNvPr id="18" name="Text 16"/>
+          <p:cNvSpPr/>
+          <p:nvPr/>
+        </p:nvSpPr>
+        <p:spPr>
+          <a:xfrm>
+            <a:off x="6995160" y="2286000"/>
+            <a:ext cx="1645920" cy="1828800"/>
+          </a:xfrm>
+          <a:prstGeom prst="rect">
+            <a:avLst/>
+          </a:prstGeom>
+          <a:noFill/>
+          <a:ln/>
+        </p:spPr>
+        <p:txBody>
+          <a:bodyPr wrap="square" rtlCol="0" anchor="t"/>
+          <a:lstStyle/>
+          <a:p>
+            <a:pPr algn="ctr" indent="0" marL="0">
+              <a:buNone/>
+            </a:pPr>
+            <a:r>
+              <a:rPr lang="en-US" sz="1100" dirty="0">
+                <a:solidFill>
+                  <a:srgbClr val="94A3B8"/>
+                </a:solidFill>
+                <a:latin typeface="Calibri" pitchFamily="34" charset="0"/>
+                <a:ea typeface="Calibri" pitchFamily="34" charset="-122"/>
+                <a:cs typeface="Calibri" pitchFamily="34" charset="-120"/>
+              </a:rPr>
+              <a:t>Hériter sans violer l'encapsulation</a:t>
+            </a:r>
+            <a:endParaRPr lang="en-US" sz="1100" dirty="0"/>
           </a:p>
         </p:txBody>
       </p:sp>
